--- a/slides/CSC336-Lecture-23-Object-Relational-Mapping.pptx
+++ b/slides/CSC336-Lecture-23-Object-Relational-Mapping.pptx
@@ -3548,79 +3548,44 @@
       </p:sp>
       <p:sp>
         <p:nvSpPr>
-          <p:cNvPr id="6" name="Text 4"/>
-          <p:cNvSpPr txBox="1"/>
-          <p:nvPr/>
-        </p:nvSpPr>
-        <p:spPr>
-          <a:xfrm>
-            <a:off x="640080" y="6446520"/>
-            <a:ext cx="8686800" cy="292608"/>
-          </a:xfrm>
-          <a:prstGeom prst="rect">
-            <a:avLst/>
-          </a:prstGeom>
-          <a:noFill/>
-          <a:ln/>
-        </p:spPr>
-        <p:txBody>
-          <a:bodyPr wrap="square" lIns="0" tIns="0" rIns="0" bIns="0" rtlCol="0" anchor="ctr"/>
-          <a:lstStyle/>
-          <a:p>
-            <a:pPr algn="l" indent="0" marL="0">
-              <a:buNone/>
-            </a:pPr>
-            <a:r>
-              <a:rPr lang="en-US" sz="900" dirty="0">
-                <a:solidFill>
-                  <a:srgbClr val="9AA3D8"/>
-                </a:solidFill>
-                <a:latin typeface="Calibri" pitchFamily="34" charset="0"/>
-                <a:ea typeface="Calibri" pitchFamily="34" charset="-122"/>
-                <a:cs typeface="Calibri" pitchFamily="34" charset="-120"/>
-              </a:rPr>
-              <a:t>Usman Akram  •  COMSATS University Islamabad</a:t>
-            </a:r>
-            <a:endParaRPr lang="en-US" sz="900" dirty="0"/>
-          </a:p>
-        </p:txBody>
-      </p:sp>
-      <p:sp>
-        <p:nvSpPr>
-          <p:cNvPr id="7" name="Text 5"/>
-          <p:cNvSpPr txBox="1"/>
-          <p:nvPr/>
-        </p:nvSpPr>
-        <p:spPr>
-          <a:xfrm>
-            <a:off x="11155680" y="6446520"/>
-            <a:ext cx="457200" cy="292608"/>
-          </a:xfrm>
-          <a:prstGeom prst="rect">
-            <a:avLst/>
-          </a:prstGeom>
-          <a:noFill/>
-          <a:ln/>
-        </p:spPr>
-        <p:txBody>
-          <a:bodyPr wrap="square" lIns="0" tIns="0" rIns="0" bIns="0" rtlCol="0" anchor="ctr"/>
-          <a:lstStyle/>
-          <a:p>
-            <a:pPr algn="r" indent="0" marL="0">
-              <a:buNone/>
-            </a:pPr>
-            <a:r>
-              <a:rPr lang="en-US" sz="900" dirty="0">
-                <a:solidFill>
-                  <a:srgbClr val="9AA3D8"/>
-                </a:solidFill>
-                <a:latin typeface="Calibri" pitchFamily="34" charset="0"/>
-                <a:ea typeface="Calibri" pitchFamily="34" charset="-122"/>
-                <a:cs typeface="Calibri" pitchFamily="34" charset="-120"/>
-              </a:rPr>
-              <a:t>1</a:t>
-            </a:r>
-            <a:endParaRPr lang="en-US" sz="900" dirty="0"/>
+          <p:cNvPr id="8" name="cuinotes-footer-mark"/>
+          <p:cNvSpPr txBox="1"/>
+          <p:nvPr/>
+        </p:nvSpPr>
+        <p:spPr>
+          <a:xfrm>
+            <a:off x="9951720" y="6455664"/>
+            <a:ext cx="2011680" cy="292608"/>
+          </a:xfrm>
+          <a:prstGeom prst="rect">
+            <a:avLst/>
+          </a:prstGeom>
+          <a:noFill/>
+        </p:spPr>
+        <p:txBody>
+          <a:bodyPr wrap="none" lIns="0" rIns="0" tIns="0" bIns="0">
+            <a:spAutoFit/>
+          </a:bodyPr>
+          <a:lstStyle/>
+          <a:p>
+            <a:pPr algn="r"/>
+            <a:r>
+              <a:rPr sz="1000">
+                <a:solidFill>
+                  <a:srgbClr val="8A939B"/>
+                </a:solidFill>
+                <a:hlinkClick r:id="rId3"/>
+              </a:rPr>
+              <a:t>cuinotes.com</a:t>
+            </a:r>
+            <a:r>
+              <a:rPr sz="1000">
+                <a:solidFill>
+                  <a:srgbClr val="8A939B"/>
+                </a:solidFill>
+              </a:rPr>
+              <a:t>  ·  1</a:t>
+            </a:r>
           </a:p>
         </p:txBody>
       </p:sp>
@@ -3753,6 +3718,10 @@
           </a:solidFill>
           <a:ln/>
         </p:spPr>
+        <p:txBody>
+          <a:bodyPr/>
+          <a:p/>
+        </p:txBody>
       </p:sp>
       <p:sp>
         <p:nvSpPr>
@@ -3851,6 +3820,10 @@
           </a:solidFill>
           <a:ln/>
         </p:spPr>
+        <p:txBody>
+          <a:bodyPr/>
+          <a:p/>
+        </p:txBody>
       </p:sp>
       <p:sp>
         <p:nvSpPr>
@@ -3949,6 +3922,10 @@
           </a:solidFill>
           <a:ln/>
         </p:spPr>
+        <p:txBody>
+          <a:bodyPr/>
+          <a:p/>
+        </p:txBody>
       </p:sp>
       <p:sp>
         <p:nvSpPr>
@@ -4030,79 +4007,44 @@
       </p:sp>
       <p:sp>
         <p:nvSpPr>
-          <p:cNvPr id="13" name="Text 11"/>
-          <p:cNvSpPr txBox="1"/>
-          <p:nvPr/>
-        </p:nvSpPr>
-        <p:spPr>
-          <a:xfrm>
-            <a:off x="640080" y="6446520"/>
-            <a:ext cx="8686800" cy="292608"/>
-          </a:xfrm>
-          <a:prstGeom prst="rect">
-            <a:avLst/>
-          </a:prstGeom>
-          <a:noFill/>
-          <a:ln/>
-        </p:spPr>
-        <p:txBody>
-          <a:bodyPr wrap="square" lIns="0" tIns="0" rIns="0" bIns="0" rtlCol="0" anchor="ctr"/>
-          <a:lstStyle/>
-          <a:p>
-            <a:pPr algn="l" indent="0" marL="0">
-              <a:buNone/>
-            </a:pPr>
-            <a:r>
-              <a:rPr lang="en-US" sz="900" dirty="0">
-                <a:solidFill>
-                  <a:srgbClr val="5D5D72"/>
-                </a:solidFill>
-                <a:latin typeface="Calibri" pitchFamily="34" charset="0"/>
-                <a:ea typeface="Calibri" pitchFamily="34" charset="-122"/>
-                <a:cs typeface="Calibri" pitchFamily="34" charset="-120"/>
-              </a:rPr>
-              <a:t>Usman Akram  •  COMSATS University Islamabad</a:t>
-            </a:r>
-            <a:endParaRPr lang="en-US" sz="900" dirty="0"/>
-          </a:p>
-        </p:txBody>
-      </p:sp>
-      <p:sp>
-        <p:nvSpPr>
-          <p:cNvPr id="14" name="Text 12"/>
-          <p:cNvSpPr txBox="1"/>
-          <p:nvPr/>
-        </p:nvSpPr>
-        <p:spPr>
-          <a:xfrm>
-            <a:off x="11155680" y="6446520"/>
-            <a:ext cx="457200" cy="292608"/>
-          </a:xfrm>
-          <a:prstGeom prst="rect">
-            <a:avLst/>
-          </a:prstGeom>
-          <a:noFill/>
-          <a:ln/>
-        </p:spPr>
-        <p:txBody>
-          <a:bodyPr wrap="square" lIns="0" tIns="0" rIns="0" bIns="0" rtlCol="0" anchor="ctr"/>
-          <a:lstStyle/>
-          <a:p>
-            <a:pPr algn="r" indent="0" marL="0">
-              <a:buNone/>
-            </a:pPr>
-            <a:r>
-              <a:rPr lang="en-US" sz="900" dirty="0">
-                <a:solidFill>
-                  <a:srgbClr val="5D5D72"/>
-                </a:solidFill>
-                <a:latin typeface="Calibri" pitchFamily="34" charset="0"/>
-                <a:ea typeface="Calibri" pitchFamily="34" charset="-122"/>
-                <a:cs typeface="Calibri" pitchFamily="34" charset="-120"/>
-              </a:rPr>
-              <a:t>10</a:t>
-            </a:r>
-            <a:endParaRPr lang="en-US" sz="900" dirty="0"/>
+          <p:cNvPr id="15" name="cuinotes-footer-mark"/>
+          <p:cNvSpPr txBox="1"/>
+          <p:nvPr/>
+        </p:nvSpPr>
+        <p:spPr>
+          <a:xfrm>
+            <a:off x="9951720" y="6455664"/>
+            <a:ext cx="2011680" cy="292608"/>
+          </a:xfrm>
+          <a:prstGeom prst="rect">
+            <a:avLst/>
+          </a:prstGeom>
+          <a:noFill/>
+        </p:spPr>
+        <p:txBody>
+          <a:bodyPr wrap="none" lIns="0" rIns="0" tIns="0" bIns="0">
+            <a:spAutoFit/>
+          </a:bodyPr>
+          <a:lstStyle/>
+          <a:p>
+            <a:pPr algn="r"/>
+            <a:r>
+              <a:rPr sz="1000">
+                <a:solidFill>
+                  <a:srgbClr val="8A939B"/>
+                </a:solidFill>
+                <a:hlinkClick r:id="rId3"/>
+              </a:rPr>
+              <a:t>cuinotes.com</a:t>
+            </a:r>
+            <a:r>
+              <a:rPr sz="1000">
+                <a:solidFill>
+                  <a:srgbClr val="8A939B"/>
+                </a:solidFill>
+              </a:rPr>
+              <a:t>  ·  10</a:t>
+            </a:r>
           </a:p>
         </p:txBody>
       </p:sp>
@@ -4242,6 +4184,10 @@
             <a:prstDash val="solid"/>
           </a:ln>
         </p:spPr>
+        <p:txBody>
+          <a:bodyPr/>
+          <a:p/>
+        </p:txBody>
       </p:sp>
       <p:sp>
         <p:nvSpPr>
@@ -4323,79 +4269,44 @@
       </p:sp>
       <p:sp>
         <p:nvSpPr>
-          <p:cNvPr id="7" name="Text 5"/>
-          <p:cNvSpPr txBox="1"/>
-          <p:nvPr/>
-        </p:nvSpPr>
-        <p:spPr>
-          <a:xfrm>
-            <a:off x="640080" y="6446520"/>
-            <a:ext cx="8686800" cy="292608"/>
-          </a:xfrm>
-          <a:prstGeom prst="rect">
-            <a:avLst/>
-          </a:prstGeom>
-          <a:noFill/>
-          <a:ln/>
-        </p:spPr>
-        <p:txBody>
-          <a:bodyPr wrap="square" lIns="0" tIns="0" rIns="0" bIns="0" rtlCol="0" anchor="ctr"/>
-          <a:lstStyle/>
-          <a:p>
-            <a:pPr algn="l" indent="0" marL="0">
-              <a:buNone/>
-            </a:pPr>
-            <a:r>
-              <a:rPr lang="en-US" sz="900" dirty="0">
-                <a:solidFill>
-                  <a:srgbClr val="5D5D72"/>
-                </a:solidFill>
-                <a:latin typeface="Calibri" pitchFamily="34" charset="0"/>
-                <a:ea typeface="Calibri" pitchFamily="34" charset="-122"/>
-                <a:cs typeface="Calibri" pitchFamily="34" charset="-120"/>
-              </a:rPr>
-              <a:t>Usman Akram  •  COMSATS University Islamabad</a:t>
-            </a:r>
-            <a:endParaRPr lang="en-US" sz="900" dirty="0"/>
-          </a:p>
-        </p:txBody>
-      </p:sp>
-      <p:sp>
-        <p:nvSpPr>
-          <p:cNvPr id="8" name="Text 6"/>
-          <p:cNvSpPr txBox="1"/>
-          <p:nvPr/>
-        </p:nvSpPr>
-        <p:spPr>
-          <a:xfrm>
-            <a:off x="11155680" y="6446520"/>
-            <a:ext cx="457200" cy="292608"/>
-          </a:xfrm>
-          <a:prstGeom prst="rect">
-            <a:avLst/>
-          </a:prstGeom>
-          <a:noFill/>
-          <a:ln/>
-        </p:spPr>
-        <p:txBody>
-          <a:bodyPr wrap="square" lIns="0" tIns="0" rIns="0" bIns="0" rtlCol="0" anchor="ctr"/>
-          <a:lstStyle/>
-          <a:p>
-            <a:pPr algn="r" indent="0" marL="0">
-              <a:buNone/>
-            </a:pPr>
-            <a:r>
-              <a:rPr lang="en-US" sz="900" dirty="0">
-                <a:solidFill>
-                  <a:srgbClr val="5D5D72"/>
-                </a:solidFill>
-                <a:latin typeface="Calibri" pitchFamily="34" charset="0"/>
-                <a:ea typeface="Calibri" pitchFamily="34" charset="-122"/>
-                <a:cs typeface="Calibri" pitchFamily="34" charset="-120"/>
-              </a:rPr>
-              <a:t>11</a:t>
-            </a:r>
-            <a:endParaRPr lang="en-US" sz="900" dirty="0"/>
+          <p:cNvPr id="9" name="cuinotes-footer-mark"/>
+          <p:cNvSpPr txBox="1"/>
+          <p:nvPr/>
+        </p:nvSpPr>
+        <p:spPr>
+          <a:xfrm>
+            <a:off x="9951720" y="6455664"/>
+            <a:ext cx="2011680" cy="292608"/>
+          </a:xfrm>
+          <a:prstGeom prst="rect">
+            <a:avLst/>
+          </a:prstGeom>
+          <a:noFill/>
+        </p:spPr>
+        <p:txBody>
+          <a:bodyPr wrap="none" lIns="0" rIns="0" tIns="0" bIns="0">
+            <a:spAutoFit/>
+          </a:bodyPr>
+          <a:lstStyle/>
+          <a:p>
+            <a:pPr algn="r"/>
+            <a:r>
+              <a:rPr sz="1000">
+                <a:solidFill>
+                  <a:srgbClr val="8A939B"/>
+                </a:solidFill>
+                <a:hlinkClick r:id="rId3"/>
+              </a:rPr>
+              <a:t>cuinotes.com</a:t>
+            </a:r>
+            <a:r>
+              <a:rPr sz="1000">
+                <a:solidFill>
+                  <a:srgbClr val="8A939B"/>
+                </a:solidFill>
+              </a:rPr>
+              <a:t>  ·  11</a:t>
+            </a:r>
           </a:p>
         </p:txBody>
       </p:sp>
@@ -4530,6 +4441,10 @@
           </a:solidFill>
           <a:ln/>
         </p:spPr>
+        <p:txBody>
+          <a:bodyPr/>
+          <a:p/>
+        </p:txBody>
       </p:sp>
       <p:sp>
         <p:nvSpPr>
@@ -4723,79 +4638,44 @@
       </p:sp>
       <p:sp>
         <p:nvSpPr>
-          <p:cNvPr id="7" name="Text 5"/>
-          <p:cNvSpPr txBox="1"/>
-          <p:nvPr/>
-        </p:nvSpPr>
-        <p:spPr>
-          <a:xfrm>
-            <a:off x="640080" y="6446520"/>
-            <a:ext cx="8686800" cy="292608"/>
-          </a:xfrm>
-          <a:prstGeom prst="rect">
-            <a:avLst/>
-          </a:prstGeom>
-          <a:noFill/>
-          <a:ln/>
-        </p:spPr>
-        <p:txBody>
-          <a:bodyPr wrap="square" lIns="0" tIns="0" rIns="0" bIns="0" rtlCol="0" anchor="ctr"/>
-          <a:lstStyle/>
-          <a:p>
-            <a:pPr algn="l" indent="0" marL="0">
-              <a:buNone/>
-            </a:pPr>
-            <a:r>
-              <a:rPr lang="en-US" sz="900" dirty="0">
-                <a:solidFill>
-                  <a:srgbClr val="5D5D72"/>
-                </a:solidFill>
-                <a:latin typeface="Calibri" pitchFamily="34" charset="0"/>
-                <a:ea typeface="Calibri" pitchFamily="34" charset="-122"/>
-                <a:cs typeface="Calibri" pitchFamily="34" charset="-120"/>
-              </a:rPr>
-              <a:t>Usman Akram  •  COMSATS University Islamabad</a:t>
-            </a:r>
-            <a:endParaRPr lang="en-US" sz="900" dirty="0"/>
-          </a:p>
-        </p:txBody>
-      </p:sp>
-      <p:sp>
-        <p:nvSpPr>
-          <p:cNvPr id="8" name="Text 6"/>
-          <p:cNvSpPr txBox="1"/>
-          <p:nvPr/>
-        </p:nvSpPr>
-        <p:spPr>
-          <a:xfrm>
-            <a:off x="11155680" y="6446520"/>
-            <a:ext cx="457200" cy="292608"/>
-          </a:xfrm>
-          <a:prstGeom prst="rect">
-            <a:avLst/>
-          </a:prstGeom>
-          <a:noFill/>
-          <a:ln/>
-        </p:spPr>
-        <p:txBody>
-          <a:bodyPr wrap="square" lIns="0" tIns="0" rIns="0" bIns="0" rtlCol="0" anchor="ctr"/>
-          <a:lstStyle/>
-          <a:p>
-            <a:pPr algn="r" indent="0" marL="0">
-              <a:buNone/>
-            </a:pPr>
-            <a:r>
-              <a:rPr lang="en-US" sz="900" dirty="0">
-                <a:solidFill>
-                  <a:srgbClr val="5D5D72"/>
-                </a:solidFill>
-                <a:latin typeface="Calibri" pitchFamily="34" charset="0"/>
-                <a:ea typeface="Calibri" pitchFamily="34" charset="-122"/>
-                <a:cs typeface="Calibri" pitchFamily="34" charset="-120"/>
-              </a:rPr>
-              <a:t>12</a:t>
-            </a:r>
-            <a:endParaRPr lang="en-US" sz="900" dirty="0"/>
+          <p:cNvPr id="9" name="cuinotes-footer-mark"/>
+          <p:cNvSpPr txBox="1"/>
+          <p:nvPr/>
+        </p:nvSpPr>
+        <p:spPr>
+          <a:xfrm>
+            <a:off x="9951720" y="6455664"/>
+            <a:ext cx="2011680" cy="292608"/>
+          </a:xfrm>
+          <a:prstGeom prst="rect">
+            <a:avLst/>
+          </a:prstGeom>
+          <a:noFill/>
+        </p:spPr>
+        <p:txBody>
+          <a:bodyPr wrap="none" lIns="0" rIns="0" tIns="0" bIns="0">
+            <a:spAutoFit/>
+          </a:bodyPr>
+          <a:lstStyle/>
+          <a:p>
+            <a:pPr algn="r"/>
+            <a:r>
+              <a:rPr sz="1000">
+                <a:solidFill>
+                  <a:srgbClr val="8A939B"/>
+                </a:solidFill>
+                <a:hlinkClick r:id="rId3"/>
+              </a:rPr>
+              <a:t>cuinotes.com</a:t>
+            </a:r>
+            <a:r>
+              <a:rPr sz="1000">
+                <a:solidFill>
+                  <a:srgbClr val="8A939B"/>
+                </a:solidFill>
+              </a:rPr>
+              <a:t>  ·  12</a:t>
+            </a:r>
           </a:p>
         </p:txBody>
       </p:sp>
@@ -4930,6 +4810,10 @@
           </a:solidFill>
           <a:ln/>
         </p:spPr>
+        <p:txBody>
+          <a:bodyPr/>
+          <a:p/>
+        </p:txBody>
       </p:sp>
       <p:sp>
         <p:nvSpPr>
@@ -5055,79 +4939,44 @@
       </p:sp>
       <p:sp>
         <p:nvSpPr>
-          <p:cNvPr id="6" name="Text 4"/>
-          <p:cNvSpPr txBox="1"/>
-          <p:nvPr/>
-        </p:nvSpPr>
-        <p:spPr>
-          <a:xfrm>
-            <a:off x="640080" y="6446520"/>
-            <a:ext cx="8686800" cy="292608"/>
-          </a:xfrm>
-          <a:prstGeom prst="rect">
-            <a:avLst/>
-          </a:prstGeom>
-          <a:noFill/>
-          <a:ln/>
-        </p:spPr>
-        <p:txBody>
-          <a:bodyPr wrap="square" lIns="0" tIns="0" rIns="0" bIns="0" rtlCol="0" anchor="ctr"/>
-          <a:lstStyle/>
-          <a:p>
-            <a:pPr algn="l" indent="0" marL="0">
-              <a:buNone/>
-            </a:pPr>
-            <a:r>
-              <a:rPr lang="en-US" sz="900" dirty="0">
-                <a:solidFill>
-                  <a:srgbClr val="5D5D72"/>
-                </a:solidFill>
-                <a:latin typeface="Calibri" pitchFamily="34" charset="0"/>
-                <a:ea typeface="Calibri" pitchFamily="34" charset="-122"/>
-                <a:cs typeface="Calibri" pitchFamily="34" charset="-120"/>
-              </a:rPr>
-              <a:t>Usman Akram  •  COMSATS University Islamabad</a:t>
-            </a:r>
-            <a:endParaRPr lang="en-US" sz="900" dirty="0"/>
-          </a:p>
-        </p:txBody>
-      </p:sp>
-      <p:sp>
-        <p:nvSpPr>
-          <p:cNvPr id="7" name="Text 5"/>
-          <p:cNvSpPr txBox="1"/>
-          <p:nvPr/>
-        </p:nvSpPr>
-        <p:spPr>
-          <a:xfrm>
-            <a:off x="11155680" y="6446520"/>
-            <a:ext cx="457200" cy="292608"/>
-          </a:xfrm>
-          <a:prstGeom prst="rect">
-            <a:avLst/>
-          </a:prstGeom>
-          <a:noFill/>
-          <a:ln/>
-        </p:spPr>
-        <p:txBody>
-          <a:bodyPr wrap="square" lIns="0" tIns="0" rIns="0" bIns="0" rtlCol="0" anchor="ctr"/>
-          <a:lstStyle/>
-          <a:p>
-            <a:pPr algn="r" indent="0" marL="0">
-              <a:buNone/>
-            </a:pPr>
-            <a:r>
-              <a:rPr lang="en-US" sz="900" dirty="0">
-                <a:solidFill>
-                  <a:srgbClr val="5D5D72"/>
-                </a:solidFill>
-                <a:latin typeface="Calibri" pitchFamily="34" charset="0"/>
-                <a:ea typeface="Calibri" pitchFamily="34" charset="-122"/>
-                <a:cs typeface="Calibri" pitchFamily="34" charset="-120"/>
-              </a:rPr>
-              <a:t>13</a:t>
-            </a:r>
-            <a:endParaRPr lang="en-US" sz="900" dirty="0"/>
+          <p:cNvPr id="8" name="cuinotes-footer-mark"/>
+          <p:cNvSpPr txBox="1"/>
+          <p:nvPr/>
+        </p:nvSpPr>
+        <p:spPr>
+          <a:xfrm>
+            <a:off x="9951720" y="6455664"/>
+            <a:ext cx="2011680" cy="292608"/>
+          </a:xfrm>
+          <a:prstGeom prst="rect">
+            <a:avLst/>
+          </a:prstGeom>
+          <a:noFill/>
+        </p:spPr>
+        <p:txBody>
+          <a:bodyPr wrap="none" lIns="0" rIns="0" tIns="0" bIns="0">
+            <a:spAutoFit/>
+          </a:bodyPr>
+          <a:lstStyle/>
+          <a:p>
+            <a:pPr algn="r"/>
+            <a:r>
+              <a:rPr sz="1000">
+                <a:solidFill>
+                  <a:srgbClr val="8A939B"/>
+                </a:solidFill>
+                <a:hlinkClick r:id="rId3"/>
+              </a:rPr>
+              <a:t>cuinotes.com</a:t>
+            </a:r>
+            <a:r>
+              <a:rPr sz="1000">
+                <a:solidFill>
+                  <a:srgbClr val="8A939B"/>
+                </a:solidFill>
+              </a:rPr>
+              <a:t>  ·  13</a:t>
+            </a:r>
           </a:p>
         </p:txBody>
       </p:sp>
@@ -5262,6 +5111,10 @@
           </a:solidFill>
           <a:ln/>
         </p:spPr>
+        <p:txBody>
+          <a:bodyPr/>
+          <a:p/>
+        </p:txBody>
       </p:sp>
       <p:sp>
         <p:nvSpPr>
@@ -5474,79 +5327,44 @@
       </p:sp>
       <p:sp>
         <p:nvSpPr>
-          <p:cNvPr id="6" name="Text 4"/>
-          <p:cNvSpPr txBox="1"/>
-          <p:nvPr/>
-        </p:nvSpPr>
-        <p:spPr>
-          <a:xfrm>
-            <a:off x="640080" y="6446520"/>
-            <a:ext cx="8686800" cy="292608"/>
-          </a:xfrm>
-          <a:prstGeom prst="rect">
-            <a:avLst/>
-          </a:prstGeom>
-          <a:noFill/>
-          <a:ln/>
-        </p:spPr>
-        <p:txBody>
-          <a:bodyPr wrap="square" lIns="0" tIns="0" rIns="0" bIns="0" rtlCol="0" anchor="ctr"/>
-          <a:lstStyle/>
-          <a:p>
-            <a:pPr algn="l" indent="0" marL="0">
-              <a:buNone/>
-            </a:pPr>
-            <a:r>
-              <a:rPr lang="en-US" sz="900" dirty="0">
-                <a:solidFill>
-                  <a:srgbClr val="5D5D72"/>
-                </a:solidFill>
-                <a:latin typeface="Calibri" pitchFamily="34" charset="0"/>
-                <a:ea typeface="Calibri" pitchFamily="34" charset="-122"/>
-                <a:cs typeface="Calibri" pitchFamily="34" charset="-120"/>
-              </a:rPr>
-              <a:t>Usman Akram  •  COMSATS University Islamabad</a:t>
-            </a:r>
-            <a:endParaRPr lang="en-US" sz="900" dirty="0"/>
-          </a:p>
-        </p:txBody>
-      </p:sp>
-      <p:sp>
-        <p:nvSpPr>
-          <p:cNvPr id="7" name="Text 5"/>
-          <p:cNvSpPr txBox="1"/>
-          <p:nvPr/>
-        </p:nvSpPr>
-        <p:spPr>
-          <a:xfrm>
-            <a:off x="11155680" y="6446520"/>
-            <a:ext cx="457200" cy="292608"/>
-          </a:xfrm>
-          <a:prstGeom prst="rect">
-            <a:avLst/>
-          </a:prstGeom>
-          <a:noFill/>
-          <a:ln/>
-        </p:spPr>
-        <p:txBody>
-          <a:bodyPr wrap="square" lIns="0" tIns="0" rIns="0" bIns="0" rtlCol="0" anchor="ctr"/>
-          <a:lstStyle/>
-          <a:p>
-            <a:pPr algn="r" indent="0" marL="0">
-              <a:buNone/>
-            </a:pPr>
-            <a:r>
-              <a:rPr lang="en-US" sz="900" dirty="0">
-                <a:solidFill>
-                  <a:srgbClr val="5D5D72"/>
-                </a:solidFill>
-                <a:latin typeface="Calibri" pitchFamily="34" charset="0"/>
-                <a:ea typeface="Calibri" pitchFamily="34" charset="-122"/>
-                <a:cs typeface="Calibri" pitchFamily="34" charset="-120"/>
-              </a:rPr>
-              <a:t>14</a:t>
-            </a:r>
-            <a:endParaRPr lang="en-US" sz="900" dirty="0"/>
+          <p:cNvPr id="8" name="cuinotes-footer-mark"/>
+          <p:cNvSpPr txBox="1"/>
+          <p:nvPr/>
+        </p:nvSpPr>
+        <p:spPr>
+          <a:xfrm>
+            <a:off x="9951720" y="6455664"/>
+            <a:ext cx="2011680" cy="292608"/>
+          </a:xfrm>
+          <a:prstGeom prst="rect">
+            <a:avLst/>
+          </a:prstGeom>
+          <a:noFill/>
+        </p:spPr>
+        <p:txBody>
+          <a:bodyPr wrap="none" lIns="0" rIns="0" tIns="0" bIns="0">
+            <a:spAutoFit/>
+          </a:bodyPr>
+          <a:lstStyle/>
+          <a:p>
+            <a:pPr algn="r"/>
+            <a:r>
+              <a:rPr sz="1000">
+                <a:solidFill>
+                  <a:srgbClr val="8A939B"/>
+                </a:solidFill>
+                <a:hlinkClick r:id="rId3"/>
+              </a:rPr>
+              <a:t>cuinotes.com</a:t>
+            </a:r>
+            <a:r>
+              <a:rPr sz="1000">
+                <a:solidFill>
+                  <a:srgbClr val="8A939B"/>
+                </a:solidFill>
+              </a:rPr>
+              <a:t>  ·  14</a:t>
+            </a:r>
           </a:p>
         </p:txBody>
       </p:sp>
@@ -5681,6 +5499,10 @@
           </a:solidFill>
           <a:ln/>
         </p:spPr>
+        <p:txBody>
+          <a:bodyPr/>
+          <a:p/>
+        </p:txBody>
       </p:sp>
       <p:sp>
         <p:nvSpPr>
@@ -5805,79 +5627,44 @@
       </p:sp>
       <p:sp>
         <p:nvSpPr>
-          <p:cNvPr id="7" name="Text 5"/>
-          <p:cNvSpPr txBox="1"/>
-          <p:nvPr/>
-        </p:nvSpPr>
-        <p:spPr>
-          <a:xfrm>
-            <a:off x="640080" y="6446520"/>
-            <a:ext cx="8686800" cy="292608"/>
-          </a:xfrm>
-          <a:prstGeom prst="rect">
-            <a:avLst/>
-          </a:prstGeom>
-          <a:noFill/>
-          <a:ln/>
-        </p:spPr>
-        <p:txBody>
-          <a:bodyPr wrap="square" lIns="0" tIns="0" rIns="0" bIns="0" rtlCol="0" anchor="ctr"/>
-          <a:lstStyle/>
-          <a:p>
-            <a:pPr algn="l" indent="0" marL="0">
-              <a:buNone/>
-            </a:pPr>
-            <a:r>
-              <a:rPr lang="en-US" sz="900" dirty="0">
-                <a:solidFill>
-                  <a:srgbClr val="5D5D72"/>
-                </a:solidFill>
-                <a:latin typeface="Calibri" pitchFamily="34" charset="0"/>
-                <a:ea typeface="Calibri" pitchFamily="34" charset="-122"/>
-                <a:cs typeface="Calibri" pitchFamily="34" charset="-120"/>
-              </a:rPr>
-              <a:t>Usman Akram  •  COMSATS University Islamabad</a:t>
-            </a:r>
-            <a:endParaRPr lang="en-US" sz="900" dirty="0"/>
-          </a:p>
-        </p:txBody>
-      </p:sp>
-      <p:sp>
-        <p:nvSpPr>
-          <p:cNvPr id="8" name="Text 6"/>
-          <p:cNvSpPr txBox="1"/>
-          <p:nvPr/>
-        </p:nvSpPr>
-        <p:spPr>
-          <a:xfrm>
-            <a:off x="11155680" y="6446520"/>
-            <a:ext cx="457200" cy="292608"/>
-          </a:xfrm>
-          <a:prstGeom prst="rect">
-            <a:avLst/>
-          </a:prstGeom>
-          <a:noFill/>
-          <a:ln/>
-        </p:spPr>
-        <p:txBody>
-          <a:bodyPr wrap="square" lIns="0" tIns="0" rIns="0" bIns="0" rtlCol="0" anchor="ctr"/>
-          <a:lstStyle/>
-          <a:p>
-            <a:pPr algn="r" indent="0" marL="0">
-              <a:buNone/>
-            </a:pPr>
-            <a:r>
-              <a:rPr lang="en-US" sz="900" dirty="0">
-                <a:solidFill>
-                  <a:srgbClr val="5D5D72"/>
-                </a:solidFill>
-                <a:latin typeface="Calibri" pitchFamily="34" charset="0"/>
-                <a:ea typeface="Calibri" pitchFamily="34" charset="-122"/>
-                <a:cs typeface="Calibri" pitchFamily="34" charset="-120"/>
-              </a:rPr>
-              <a:t>15</a:t>
-            </a:r>
-            <a:endParaRPr lang="en-US" sz="900" dirty="0"/>
+          <p:cNvPr id="9" name="cuinotes-footer-mark"/>
+          <p:cNvSpPr txBox="1"/>
+          <p:nvPr/>
+        </p:nvSpPr>
+        <p:spPr>
+          <a:xfrm>
+            <a:off x="9951720" y="6455664"/>
+            <a:ext cx="2011680" cy="292608"/>
+          </a:xfrm>
+          <a:prstGeom prst="rect">
+            <a:avLst/>
+          </a:prstGeom>
+          <a:noFill/>
+        </p:spPr>
+        <p:txBody>
+          <a:bodyPr wrap="none" lIns="0" rIns="0" tIns="0" bIns="0">
+            <a:spAutoFit/>
+          </a:bodyPr>
+          <a:lstStyle/>
+          <a:p>
+            <a:pPr algn="r"/>
+            <a:r>
+              <a:rPr sz="1000">
+                <a:solidFill>
+                  <a:srgbClr val="8A939B"/>
+                </a:solidFill>
+                <a:hlinkClick r:id="rId3"/>
+              </a:rPr>
+              <a:t>cuinotes.com</a:t>
+            </a:r>
+            <a:r>
+              <a:rPr sz="1000">
+                <a:solidFill>
+                  <a:srgbClr val="8A939B"/>
+                </a:solidFill>
+              </a:rPr>
+              <a:t>  ·  15</a:t>
+            </a:r>
           </a:p>
         </p:txBody>
       </p:sp>
@@ -6012,6 +5799,10 @@
           </a:solidFill>
           <a:ln/>
         </p:spPr>
+        <p:txBody>
+          <a:bodyPr/>
+          <a:p/>
+        </p:txBody>
       </p:sp>
       <p:sp>
         <p:nvSpPr>
@@ -6256,79 +6047,44 @@
       </p:sp>
       <p:sp>
         <p:nvSpPr>
-          <p:cNvPr id="7" name="Text 5"/>
-          <p:cNvSpPr txBox="1"/>
-          <p:nvPr/>
-        </p:nvSpPr>
-        <p:spPr>
-          <a:xfrm>
-            <a:off x="640080" y="6446520"/>
-            <a:ext cx="8686800" cy="292608"/>
-          </a:xfrm>
-          <a:prstGeom prst="rect">
-            <a:avLst/>
-          </a:prstGeom>
-          <a:noFill/>
-          <a:ln/>
-        </p:spPr>
-        <p:txBody>
-          <a:bodyPr wrap="square" lIns="0" tIns="0" rIns="0" bIns="0" rtlCol="0" anchor="ctr"/>
-          <a:lstStyle/>
-          <a:p>
-            <a:pPr algn="l" indent="0" marL="0">
-              <a:buNone/>
-            </a:pPr>
-            <a:r>
-              <a:rPr lang="en-US" sz="900" dirty="0">
-                <a:solidFill>
-                  <a:srgbClr val="5D5D72"/>
-                </a:solidFill>
-                <a:latin typeface="Calibri" pitchFamily="34" charset="0"/>
-                <a:ea typeface="Calibri" pitchFamily="34" charset="-122"/>
-                <a:cs typeface="Calibri" pitchFamily="34" charset="-120"/>
-              </a:rPr>
-              <a:t>Usman Akram  •  COMSATS University Islamabad</a:t>
-            </a:r>
-            <a:endParaRPr lang="en-US" sz="900" dirty="0"/>
-          </a:p>
-        </p:txBody>
-      </p:sp>
-      <p:sp>
-        <p:nvSpPr>
-          <p:cNvPr id="8" name="Text 6"/>
-          <p:cNvSpPr txBox="1"/>
-          <p:nvPr/>
-        </p:nvSpPr>
-        <p:spPr>
-          <a:xfrm>
-            <a:off x="11155680" y="6446520"/>
-            <a:ext cx="457200" cy="292608"/>
-          </a:xfrm>
-          <a:prstGeom prst="rect">
-            <a:avLst/>
-          </a:prstGeom>
-          <a:noFill/>
-          <a:ln/>
-        </p:spPr>
-        <p:txBody>
-          <a:bodyPr wrap="square" lIns="0" tIns="0" rIns="0" bIns="0" rtlCol="0" anchor="ctr"/>
-          <a:lstStyle/>
-          <a:p>
-            <a:pPr algn="r" indent="0" marL="0">
-              <a:buNone/>
-            </a:pPr>
-            <a:r>
-              <a:rPr lang="en-US" sz="900" dirty="0">
-                <a:solidFill>
-                  <a:srgbClr val="5D5D72"/>
-                </a:solidFill>
-                <a:latin typeface="Calibri" pitchFamily="34" charset="0"/>
-                <a:ea typeface="Calibri" pitchFamily="34" charset="-122"/>
-                <a:cs typeface="Calibri" pitchFamily="34" charset="-120"/>
-              </a:rPr>
-              <a:t>16</a:t>
-            </a:r>
-            <a:endParaRPr lang="en-US" sz="900" dirty="0"/>
+          <p:cNvPr id="9" name="cuinotes-footer-mark"/>
+          <p:cNvSpPr txBox="1"/>
+          <p:nvPr/>
+        </p:nvSpPr>
+        <p:spPr>
+          <a:xfrm>
+            <a:off x="9951720" y="6455664"/>
+            <a:ext cx="2011680" cy="292608"/>
+          </a:xfrm>
+          <a:prstGeom prst="rect">
+            <a:avLst/>
+          </a:prstGeom>
+          <a:noFill/>
+        </p:spPr>
+        <p:txBody>
+          <a:bodyPr wrap="none" lIns="0" rIns="0" tIns="0" bIns="0">
+            <a:spAutoFit/>
+          </a:bodyPr>
+          <a:lstStyle/>
+          <a:p>
+            <a:pPr algn="r"/>
+            <a:r>
+              <a:rPr sz="1000">
+                <a:solidFill>
+                  <a:srgbClr val="8A939B"/>
+                </a:solidFill>
+                <a:hlinkClick r:id="rId3"/>
+              </a:rPr>
+              <a:t>cuinotes.com</a:t>
+            </a:r>
+            <a:r>
+              <a:rPr sz="1000">
+                <a:solidFill>
+                  <a:srgbClr val="8A939B"/>
+                </a:solidFill>
+              </a:rPr>
+              <a:t>  ·  16</a:t>
+            </a:r>
           </a:p>
         </p:txBody>
       </p:sp>
@@ -6463,6 +6219,10 @@
           </a:solidFill>
           <a:ln/>
         </p:spPr>
+        <p:txBody>
+          <a:bodyPr/>
+          <a:p/>
+        </p:txBody>
       </p:sp>
       <p:sp>
         <p:nvSpPr>
@@ -6657,79 +6417,44 @@
       </p:sp>
       <p:sp>
         <p:nvSpPr>
-          <p:cNvPr id="6" name="Text 4"/>
-          <p:cNvSpPr txBox="1"/>
-          <p:nvPr/>
-        </p:nvSpPr>
-        <p:spPr>
-          <a:xfrm>
-            <a:off x="640080" y="6446520"/>
-            <a:ext cx="8686800" cy="292608"/>
-          </a:xfrm>
-          <a:prstGeom prst="rect">
-            <a:avLst/>
-          </a:prstGeom>
-          <a:noFill/>
-          <a:ln/>
-        </p:spPr>
-        <p:txBody>
-          <a:bodyPr wrap="square" lIns="0" tIns="0" rIns="0" bIns="0" rtlCol="0" anchor="ctr"/>
-          <a:lstStyle/>
-          <a:p>
-            <a:pPr algn="l" indent="0" marL="0">
-              <a:buNone/>
-            </a:pPr>
-            <a:r>
-              <a:rPr lang="en-US" sz="900" dirty="0">
-                <a:solidFill>
-                  <a:srgbClr val="5D5D72"/>
-                </a:solidFill>
-                <a:latin typeface="Calibri" pitchFamily="34" charset="0"/>
-                <a:ea typeface="Calibri" pitchFamily="34" charset="-122"/>
-                <a:cs typeface="Calibri" pitchFamily="34" charset="-120"/>
-              </a:rPr>
-              <a:t>Usman Akram  •  COMSATS University Islamabad</a:t>
-            </a:r>
-            <a:endParaRPr lang="en-US" sz="900" dirty="0"/>
-          </a:p>
-        </p:txBody>
-      </p:sp>
-      <p:sp>
-        <p:nvSpPr>
-          <p:cNvPr id="7" name="Text 5"/>
-          <p:cNvSpPr txBox="1"/>
-          <p:nvPr/>
-        </p:nvSpPr>
-        <p:spPr>
-          <a:xfrm>
-            <a:off x="11155680" y="6446520"/>
-            <a:ext cx="457200" cy="292608"/>
-          </a:xfrm>
-          <a:prstGeom prst="rect">
-            <a:avLst/>
-          </a:prstGeom>
-          <a:noFill/>
-          <a:ln/>
-        </p:spPr>
-        <p:txBody>
-          <a:bodyPr wrap="square" lIns="0" tIns="0" rIns="0" bIns="0" rtlCol="0" anchor="ctr"/>
-          <a:lstStyle/>
-          <a:p>
-            <a:pPr algn="r" indent="0" marL="0">
-              <a:buNone/>
-            </a:pPr>
-            <a:r>
-              <a:rPr lang="en-US" sz="900" dirty="0">
-                <a:solidFill>
-                  <a:srgbClr val="5D5D72"/>
-                </a:solidFill>
-                <a:latin typeface="Calibri" pitchFamily="34" charset="0"/>
-                <a:ea typeface="Calibri" pitchFamily="34" charset="-122"/>
-                <a:cs typeface="Calibri" pitchFamily="34" charset="-120"/>
-              </a:rPr>
-              <a:t>17</a:t>
-            </a:r>
-            <a:endParaRPr lang="en-US" sz="900" dirty="0"/>
+          <p:cNvPr id="8" name="cuinotes-footer-mark"/>
+          <p:cNvSpPr txBox="1"/>
+          <p:nvPr/>
+        </p:nvSpPr>
+        <p:spPr>
+          <a:xfrm>
+            <a:off x="9951720" y="6455664"/>
+            <a:ext cx="2011680" cy="292608"/>
+          </a:xfrm>
+          <a:prstGeom prst="rect">
+            <a:avLst/>
+          </a:prstGeom>
+          <a:noFill/>
+        </p:spPr>
+        <p:txBody>
+          <a:bodyPr wrap="none" lIns="0" rIns="0" tIns="0" bIns="0">
+            <a:spAutoFit/>
+          </a:bodyPr>
+          <a:lstStyle/>
+          <a:p>
+            <a:pPr algn="r"/>
+            <a:r>
+              <a:rPr sz="1000">
+                <a:solidFill>
+                  <a:srgbClr val="8A939B"/>
+                </a:solidFill>
+                <a:hlinkClick r:id="rId3"/>
+              </a:rPr>
+              <a:t>cuinotes.com</a:t>
+            </a:r>
+            <a:r>
+              <a:rPr sz="1000">
+                <a:solidFill>
+                  <a:srgbClr val="8A939B"/>
+                </a:solidFill>
+              </a:rPr>
+              <a:t>  ·  17</a:t>
+            </a:r>
           </a:p>
         </p:txBody>
       </p:sp>
@@ -6869,6 +6594,10 @@
             <a:prstDash val="solid"/>
           </a:ln>
         </p:spPr>
+        <p:txBody>
+          <a:bodyPr/>
+          <a:p/>
+        </p:txBody>
       </p:sp>
       <p:sp>
         <p:nvSpPr>
@@ -6950,79 +6679,44 @@
       </p:sp>
       <p:sp>
         <p:nvSpPr>
-          <p:cNvPr id="7" name="Text 5"/>
-          <p:cNvSpPr txBox="1"/>
-          <p:nvPr/>
-        </p:nvSpPr>
-        <p:spPr>
-          <a:xfrm>
-            <a:off x="640080" y="6446520"/>
-            <a:ext cx="8686800" cy="292608"/>
-          </a:xfrm>
-          <a:prstGeom prst="rect">
-            <a:avLst/>
-          </a:prstGeom>
-          <a:noFill/>
-          <a:ln/>
-        </p:spPr>
-        <p:txBody>
-          <a:bodyPr wrap="square" lIns="0" tIns="0" rIns="0" bIns="0" rtlCol="0" anchor="ctr"/>
-          <a:lstStyle/>
-          <a:p>
-            <a:pPr algn="l" indent="0" marL="0">
-              <a:buNone/>
-            </a:pPr>
-            <a:r>
-              <a:rPr lang="en-US" sz="900" dirty="0">
-                <a:solidFill>
-                  <a:srgbClr val="5D5D72"/>
-                </a:solidFill>
-                <a:latin typeface="Calibri" pitchFamily="34" charset="0"/>
-                <a:ea typeface="Calibri" pitchFamily="34" charset="-122"/>
-                <a:cs typeface="Calibri" pitchFamily="34" charset="-120"/>
-              </a:rPr>
-              <a:t>Usman Akram  •  COMSATS University Islamabad</a:t>
-            </a:r>
-            <a:endParaRPr lang="en-US" sz="900" dirty="0"/>
-          </a:p>
-        </p:txBody>
-      </p:sp>
-      <p:sp>
-        <p:nvSpPr>
-          <p:cNvPr id="8" name="Text 6"/>
-          <p:cNvSpPr txBox="1"/>
-          <p:nvPr/>
-        </p:nvSpPr>
-        <p:spPr>
-          <a:xfrm>
-            <a:off x="11155680" y="6446520"/>
-            <a:ext cx="457200" cy="292608"/>
-          </a:xfrm>
-          <a:prstGeom prst="rect">
-            <a:avLst/>
-          </a:prstGeom>
-          <a:noFill/>
-          <a:ln/>
-        </p:spPr>
-        <p:txBody>
-          <a:bodyPr wrap="square" lIns="0" tIns="0" rIns="0" bIns="0" rtlCol="0" anchor="ctr"/>
-          <a:lstStyle/>
-          <a:p>
-            <a:pPr algn="r" indent="0" marL="0">
-              <a:buNone/>
-            </a:pPr>
-            <a:r>
-              <a:rPr lang="en-US" sz="900" dirty="0">
-                <a:solidFill>
-                  <a:srgbClr val="5D5D72"/>
-                </a:solidFill>
-                <a:latin typeface="Calibri" pitchFamily="34" charset="0"/>
-                <a:ea typeface="Calibri" pitchFamily="34" charset="-122"/>
-                <a:cs typeface="Calibri" pitchFamily="34" charset="-120"/>
-              </a:rPr>
-              <a:t>18</a:t>
-            </a:r>
-            <a:endParaRPr lang="en-US" sz="900" dirty="0"/>
+          <p:cNvPr id="9" name="cuinotes-footer-mark"/>
+          <p:cNvSpPr txBox="1"/>
+          <p:nvPr/>
+        </p:nvSpPr>
+        <p:spPr>
+          <a:xfrm>
+            <a:off x="9951720" y="6455664"/>
+            <a:ext cx="2011680" cy="292608"/>
+          </a:xfrm>
+          <a:prstGeom prst="rect">
+            <a:avLst/>
+          </a:prstGeom>
+          <a:noFill/>
+        </p:spPr>
+        <p:txBody>
+          <a:bodyPr wrap="none" lIns="0" rIns="0" tIns="0" bIns="0">
+            <a:spAutoFit/>
+          </a:bodyPr>
+          <a:lstStyle/>
+          <a:p>
+            <a:pPr algn="r"/>
+            <a:r>
+              <a:rPr sz="1000">
+                <a:solidFill>
+                  <a:srgbClr val="8A939B"/>
+                </a:solidFill>
+                <a:hlinkClick r:id="rId3"/>
+              </a:rPr>
+              <a:t>cuinotes.com</a:t>
+            </a:r>
+            <a:r>
+              <a:rPr sz="1000">
+                <a:solidFill>
+                  <a:srgbClr val="8A939B"/>
+                </a:solidFill>
+              </a:rPr>
+              <a:t>  ·  18</a:t>
+            </a:r>
           </a:p>
         </p:txBody>
       </p:sp>
@@ -7157,6 +6851,10 @@
           </a:solidFill>
           <a:ln/>
         </p:spPr>
+        <p:txBody>
+          <a:bodyPr/>
+          <a:p/>
+        </p:txBody>
       </p:sp>
       <p:sp>
         <p:nvSpPr>
@@ -7222,79 +6920,44 @@
       </p:sp>
       <p:sp>
         <p:nvSpPr>
-          <p:cNvPr id="6" name="Text 4"/>
-          <p:cNvSpPr txBox="1"/>
-          <p:nvPr/>
-        </p:nvSpPr>
-        <p:spPr>
-          <a:xfrm>
-            <a:off x="640080" y="6446520"/>
-            <a:ext cx="8686800" cy="292608"/>
-          </a:xfrm>
-          <a:prstGeom prst="rect">
-            <a:avLst/>
-          </a:prstGeom>
-          <a:noFill/>
-          <a:ln/>
-        </p:spPr>
-        <p:txBody>
-          <a:bodyPr wrap="square" lIns="0" tIns="0" rIns="0" bIns="0" rtlCol="0" anchor="ctr"/>
-          <a:lstStyle/>
-          <a:p>
-            <a:pPr algn="l" indent="0" marL="0">
-              <a:buNone/>
-            </a:pPr>
-            <a:r>
-              <a:rPr lang="en-US" sz="900" dirty="0">
-                <a:solidFill>
-                  <a:srgbClr val="5D5D72"/>
-                </a:solidFill>
-                <a:latin typeface="Calibri" pitchFamily="34" charset="0"/>
-                <a:ea typeface="Calibri" pitchFamily="34" charset="-122"/>
-                <a:cs typeface="Calibri" pitchFamily="34" charset="-120"/>
-              </a:rPr>
-              <a:t>Usman Akram  •  COMSATS University Islamabad</a:t>
-            </a:r>
-            <a:endParaRPr lang="en-US" sz="900" dirty="0"/>
-          </a:p>
-        </p:txBody>
-      </p:sp>
-      <p:sp>
-        <p:nvSpPr>
-          <p:cNvPr id="7" name="Text 5"/>
-          <p:cNvSpPr txBox="1"/>
-          <p:nvPr/>
-        </p:nvSpPr>
-        <p:spPr>
-          <a:xfrm>
-            <a:off x="11155680" y="6446520"/>
-            <a:ext cx="457200" cy="292608"/>
-          </a:xfrm>
-          <a:prstGeom prst="rect">
-            <a:avLst/>
-          </a:prstGeom>
-          <a:noFill/>
-          <a:ln/>
-        </p:spPr>
-        <p:txBody>
-          <a:bodyPr wrap="square" lIns="0" tIns="0" rIns="0" bIns="0" rtlCol="0" anchor="ctr"/>
-          <a:lstStyle/>
-          <a:p>
-            <a:pPr algn="r" indent="0" marL="0">
-              <a:buNone/>
-            </a:pPr>
-            <a:r>
-              <a:rPr lang="en-US" sz="900" dirty="0">
-                <a:solidFill>
-                  <a:srgbClr val="5D5D72"/>
-                </a:solidFill>
-                <a:latin typeface="Calibri" pitchFamily="34" charset="0"/>
-                <a:ea typeface="Calibri" pitchFamily="34" charset="-122"/>
-                <a:cs typeface="Calibri" pitchFamily="34" charset="-120"/>
-              </a:rPr>
-              <a:t>19</a:t>
-            </a:r>
-            <a:endParaRPr lang="en-US" sz="900" dirty="0"/>
+          <p:cNvPr id="8" name="cuinotes-footer-mark"/>
+          <p:cNvSpPr txBox="1"/>
+          <p:nvPr/>
+        </p:nvSpPr>
+        <p:spPr>
+          <a:xfrm>
+            <a:off x="9951720" y="6455664"/>
+            <a:ext cx="2011680" cy="292608"/>
+          </a:xfrm>
+          <a:prstGeom prst="rect">
+            <a:avLst/>
+          </a:prstGeom>
+          <a:noFill/>
+        </p:spPr>
+        <p:txBody>
+          <a:bodyPr wrap="none" lIns="0" rIns="0" tIns="0" bIns="0">
+            <a:spAutoFit/>
+          </a:bodyPr>
+          <a:lstStyle/>
+          <a:p>
+            <a:pPr algn="r"/>
+            <a:r>
+              <a:rPr sz="1000">
+                <a:solidFill>
+                  <a:srgbClr val="8A939B"/>
+                </a:solidFill>
+                <a:hlinkClick r:id="rId3"/>
+              </a:rPr>
+              <a:t>cuinotes.com</a:t>
+            </a:r>
+            <a:r>
+              <a:rPr sz="1000">
+                <a:solidFill>
+                  <a:srgbClr val="8A939B"/>
+                </a:solidFill>
+              </a:rPr>
+              <a:t>  ·  19</a:t>
+            </a:r>
           </a:p>
         </p:txBody>
       </p:sp>
@@ -7427,6 +7090,10 @@
           </a:solidFill>
           <a:ln/>
         </p:spPr>
+        <p:txBody>
+          <a:bodyPr/>
+          <a:p/>
+        </p:txBody>
       </p:sp>
       <p:sp>
         <p:nvSpPr>
@@ -7525,6 +7192,10 @@
           </a:solidFill>
           <a:ln/>
         </p:spPr>
+        <p:txBody>
+          <a:bodyPr/>
+          <a:p/>
+        </p:txBody>
       </p:sp>
       <p:sp>
         <p:nvSpPr>
@@ -7623,6 +7294,10 @@
           </a:solidFill>
           <a:ln/>
         </p:spPr>
+        <p:txBody>
+          <a:bodyPr/>
+          <a:p/>
+        </p:txBody>
       </p:sp>
       <p:sp>
         <p:nvSpPr>
@@ -7721,6 +7396,10 @@
           </a:solidFill>
           <a:ln/>
         </p:spPr>
+        <p:txBody>
+          <a:bodyPr/>
+          <a:p/>
+        </p:txBody>
       </p:sp>
       <p:sp>
         <p:nvSpPr>
@@ -7819,6 +7498,10 @@
           </a:solidFill>
           <a:ln/>
         </p:spPr>
+        <p:txBody>
+          <a:bodyPr/>
+          <a:p/>
+        </p:txBody>
       </p:sp>
       <p:sp>
         <p:nvSpPr>
@@ -7900,79 +7583,44 @@
       </p:sp>
       <p:sp>
         <p:nvSpPr>
-          <p:cNvPr id="19" name="Text 17"/>
-          <p:cNvSpPr txBox="1"/>
-          <p:nvPr/>
-        </p:nvSpPr>
-        <p:spPr>
-          <a:xfrm>
-            <a:off x="640080" y="6446520"/>
-            <a:ext cx="8686800" cy="292608"/>
-          </a:xfrm>
-          <a:prstGeom prst="rect">
-            <a:avLst/>
-          </a:prstGeom>
-          <a:noFill/>
-          <a:ln/>
-        </p:spPr>
-        <p:txBody>
-          <a:bodyPr wrap="square" lIns="0" tIns="0" rIns="0" bIns="0" rtlCol="0" anchor="ctr"/>
-          <a:lstStyle/>
-          <a:p>
-            <a:pPr algn="l" indent="0" marL="0">
-              <a:buNone/>
-            </a:pPr>
-            <a:r>
-              <a:rPr lang="en-US" sz="900" dirty="0">
-                <a:solidFill>
-                  <a:srgbClr val="5D5D72"/>
-                </a:solidFill>
-                <a:latin typeface="Calibri" pitchFamily="34" charset="0"/>
-                <a:ea typeface="Calibri" pitchFamily="34" charset="-122"/>
-                <a:cs typeface="Calibri" pitchFamily="34" charset="-120"/>
-              </a:rPr>
-              <a:t>Usman Akram  •  COMSATS University Islamabad</a:t>
-            </a:r>
-            <a:endParaRPr lang="en-US" sz="900" dirty="0"/>
-          </a:p>
-        </p:txBody>
-      </p:sp>
-      <p:sp>
-        <p:nvSpPr>
-          <p:cNvPr id="20" name="Text 18"/>
-          <p:cNvSpPr txBox="1"/>
-          <p:nvPr/>
-        </p:nvSpPr>
-        <p:spPr>
-          <a:xfrm>
-            <a:off x="11155680" y="6446520"/>
-            <a:ext cx="457200" cy="292608"/>
-          </a:xfrm>
-          <a:prstGeom prst="rect">
-            <a:avLst/>
-          </a:prstGeom>
-          <a:noFill/>
-          <a:ln/>
-        </p:spPr>
-        <p:txBody>
-          <a:bodyPr wrap="square" lIns="0" tIns="0" rIns="0" bIns="0" rtlCol="0" anchor="ctr"/>
-          <a:lstStyle/>
-          <a:p>
-            <a:pPr algn="r" indent="0" marL="0">
-              <a:buNone/>
-            </a:pPr>
-            <a:r>
-              <a:rPr lang="en-US" sz="900" dirty="0">
-                <a:solidFill>
-                  <a:srgbClr val="5D5D72"/>
-                </a:solidFill>
-                <a:latin typeface="Calibri" pitchFamily="34" charset="0"/>
-                <a:ea typeface="Calibri" pitchFamily="34" charset="-122"/>
-                <a:cs typeface="Calibri" pitchFamily="34" charset="-120"/>
-              </a:rPr>
-              <a:t>2</a:t>
-            </a:r>
-            <a:endParaRPr lang="en-US" sz="900" dirty="0"/>
+          <p:cNvPr id="21" name="cuinotes-footer-mark"/>
+          <p:cNvSpPr txBox="1"/>
+          <p:nvPr/>
+        </p:nvSpPr>
+        <p:spPr>
+          <a:xfrm>
+            <a:off x="9951720" y="6455664"/>
+            <a:ext cx="2011680" cy="292608"/>
+          </a:xfrm>
+          <a:prstGeom prst="rect">
+            <a:avLst/>
+          </a:prstGeom>
+          <a:noFill/>
+        </p:spPr>
+        <p:txBody>
+          <a:bodyPr wrap="none" lIns="0" rIns="0" tIns="0" bIns="0">
+            <a:spAutoFit/>
+          </a:bodyPr>
+          <a:lstStyle/>
+          <a:p>
+            <a:pPr algn="r"/>
+            <a:r>
+              <a:rPr sz="1000">
+                <a:solidFill>
+                  <a:srgbClr val="8A939B"/>
+                </a:solidFill>
+                <a:hlinkClick r:id="rId3"/>
+              </a:rPr>
+              <a:t>cuinotes.com</a:t>
+            </a:r>
+            <a:r>
+              <a:rPr sz="1000">
+                <a:solidFill>
+                  <a:srgbClr val="8A939B"/>
+                </a:solidFill>
+              </a:rPr>
+              <a:t>  ·  2</a:t>
+            </a:r>
           </a:p>
         </p:txBody>
       </p:sp>
@@ -8105,6 +7753,10 @@
           </a:solidFill>
           <a:ln/>
         </p:spPr>
+        <p:txBody>
+          <a:bodyPr/>
+          <a:p/>
+        </p:txBody>
       </p:sp>
       <p:sp>
         <p:nvSpPr>
@@ -8203,6 +7855,10 @@
           </a:solidFill>
           <a:ln/>
         </p:spPr>
+        <p:txBody>
+          <a:bodyPr/>
+          <a:p/>
+        </p:txBody>
       </p:sp>
       <p:sp>
         <p:nvSpPr>
@@ -8301,6 +7957,10 @@
           </a:solidFill>
           <a:ln/>
         </p:spPr>
+        <p:txBody>
+          <a:bodyPr/>
+          <a:p/>
+        </p:txBody>
       </p:sp>
       <p:sp>
         <p:nvSpPr>
@@ -8382,79 +8042,44 @@
       </p:sp>
       <p:sp>
         <p:nvSpPr>
-          <p:cNvPr id="13" name="Text 11"/>
-          <p:cNvSpPr txBox="1"/>
-          <p:nvPr/>
-        </p:nvSpPr>
-        <p:spPr>
-          <a:xfrm>
-            <a:off x="640080" y="6446520"/>
-            <a:ext cx="8686800" cy="292608"/>
-          </a:xfrm>
-          <a:prstGeom prst="rect">
-            <a:avLst/>
-          </a:prstGeom>
-          <a:noFill/>
-          <a:ln/>
-        </p:spPr>
-        <p:txBody>
-          <a:bodyPr wrap="square" lIns="0" tIns="0" rIns="0" bIns="0" rtlCol="0" anchor="ctr"/>
-          <a:lstStyle/>
-          <a:p>
-            <a:pPr algn="l" indent="0" marL="0">
-              <a:buNone/>
-            </a:pPr>
-            <a:r>
-              <a:rPr lang="en-US" sz="900" dirty="0">
-                <a:solidFill>
-                  <a:srgbClr val="5D5D72"/>
-                </a:solidFill>
-                <a:latin typeface="Calibri" pitchFamily="34" charset="0"/>
-                <a:ea typeface="Calibri" pitchFamily="34" charset="-122"/>
-                <a:cs typeface="Calibri" pitchFamily="34" charset="-120"/>
-              </a:rPr>
-              <a:t>Usman Akram  •  COMSATS University Islamabad</a:t>
-            </a:r>
-            <a:endParaRPr lang="en-US" sz="900" dirty="0"/>
-          </a:p>
-        </p:txBody>
-      </p:sp>
-      <p:sp>
-        <p:nvSpPr>
-          <p:cNvPr id="14" name="Text 12"/>
-          <p:cNvSpPr txBox="1"/>
-          <p:nvPr/>
-        </p:nvSpPr>
-        <p:spPr>
-          <a:xfrm>
-            <a:off x="11155680" y="6446520"/>
-            <a:ext cx="457200" cy="292608"/>
-          </a:xfrm>
-          <a:prstGeom prst="rect">
-            <a:avLst/>
-          </a:prstGeom>
-          <a:noFill/>
-          <a:ln/>
-        </p:spPr>
-        <p:txBody>
-          <a:bodyPr wrap="square" lIns="0" tIns="0" rIns="0" bIns="0" rtlCol="0" anchor="ctr"/>
-          <a:lstStyle/>
-          <a:p>
-            <a:pPr algn="r" indent="0" marL="0">
-              <a:buNone/>
-            </a:pPr>
-            <a:r>
-              <a:rPr lang="en-US" sz="900" dirty="0">
-                <a:solidFill>
-                  <a:srgbClr val="5D5D72"/>
-                </a:solidFill>
-                <a:latin typeface="Calibri" pitchFamily="34" charset="0"/>
-                <a:ea typeface="Calibri" pitchFamily="34" charset="-122"/>
-                <a:cs typeface="Calibri" pitchFamily="34" charset="-120"/>
-              </a:rPr>
-              <a:t>20</a:t>
-            </a:r>
-            <a:endParaRPr lang="en-US" sz="900" dirty="0"/>
+          <p:cNvPr id="15" name="cuinotes-footer-mark"/>
+          <p:cNvSpPr txBox="1"/>
+          <p:nvPr/>
+        </p:nvSpPr>
+        <p:spPr>
+          <a:xfrm>
+            <a:off x="9951720" y="6455664"/>
+            <a:ext cx="2011680" cy="292608"/>
+          </a:xfrm>
+          <a:prstGeom prst="rect">
+            <a:avLst/>
+          </a:prstGeom>
+          <a:noFill/>
+        </p:spPr>
+        <p:txBody>
+          <a:bodyPr wrap="none" lIns="0" rIns="0" tIns="0" bIns="0">
+            <a:spAutoFit/>
+          </a:bodyPr>
+          <a:lstStyle/>
+          <a:p>
+            <a:pPr algn="r"/>
+            <a:r>
+              <a:rPr sz="1000">
+                <a:solidFill>
+                  <a:srgbClr val="8A939B"/>
+                </a:solidFill>
+                <a:hlinkClick r:id="rId3"/>
+              </a:rPr>
+              <a:t>cuinotes.com</a:t>
+            </a:r>
+            <a:r>
+              <a:rPr sz="1000">
+                <a:solidFill>
+                  <a:srgbClr val="8A939B"/>
+                </a:solidFill>
+              </a:rPr>
+              <a:t>  ·  20</a:t>
+            </a:r>
           </a:p>
         </p:txBody>
       </p:sp>
@@ -8589,6 +8214,10 @@
           </a:solidFill>
           <a:ln/>
         </p:spPr>
+        <p:txBody>
+          <a:bodyPr/>
+          <a:p/>
+        </p:txBody>
       </p:sp>
       <p:sp>
         <p:nvSpPr>
@@ -8823,79 +8452,44 @@
       </p:sp>
       <p:sp>
         <p:nvSpPr>
-          <p:cNvPr id="6" name="Text 4"/>
-          <p:cNvSpPr txBox="1"/>
-          <p:nvPr/>
-        </p:nvSpPr>
-        <p:spPr>
-          <a:xfrm>
-            <a:off x="640080" y="6446520"/>
-            <a:ext cx="8686800" cy="292608"/>
-          </a:xfrm>
-          <a:prstGeom prst="rect">
-            <a:avLst/>
-          </a:prstGeom>
-          <a:noFill/>
-          <a:ln/>
-        </p:spPr>
-        <p:txBody>
-          <a:bodyPr wrap="square" lIns="0" tIns="0" rIns="0" bIns="0" rtlCol="0" anchor="ctr"/>
-          <a:lstStyle/>
-          <a:p>
-            <a:pPr algn="l" indent="0" marL="0">
-              <a:buNone/>
-            </a:pPr>
-            <a:r>
-              <a:rPr lang="en-US" sz="900" dirty="0">
-                <a:solidFill>
-                  <a:srgbClr val="5D5D72"/>
-                </a:solidFill>
-                <a:latin typeface="Calibri" pitchFamily="34" charset="0"/>
-                <a:ea typeface="Calibri" pitchFamily="34" charset="-122"/>
-                <a:cs typeface="Calibri" pitchFamily="34" charset="-120"/>
-              </a:rPr>
-              <a:t>Usman Akram  •  COMSATS University Islamabad</a:t>
-            </a:r>
-            <a:endParaRPr lang="en-US" sz="900" dirty="0"/>
-          </a:p>
-        </p:txBody>
-      </p:sp>
-      <p:sp>
-        <p:nvSpPr>
-          <p:cNvPr id="7" name="Text 5"/>
-          <p:cNvSpPr txBox="1"/>
-          <p:nvPr/>
-        </p:nvSpPr>
-        <p:spPr>
-          <a:xfrm>
-            <a:off x="11155680" y="6446520"/>
-            <a:ext cx="457200" cy="292608"/>
-          </a:xfrm>
-          <a:prstGeom prst="rect">
-            <a:avLst/>
-          </a:prstGeom>
-          <a:noFill/>
-          <a:ln/>
-        </p:spPr>
-        <p:txBody>
-          <a:bodyPr wrap="square" lIns="0" tIns="0" rIns="0" bIns="0" rtlCol="0" anchor="ctr"/>
-          <a:lstStyle/>
-          <a:p>
-            <a:pPr algn="r" indent="0" marL="0">
-              <a:buNone/>
-            </a:pPr>
-            <a:r>
-              <a:rPr lang="en-US" sz="900" dirty="0">
-                <a:solidFill>
-                  <a:srgbClr val="5D5D72"/>
-                </a:solidFill>
-                <a:latin typeface="Calibri" pitchFamily="34" charset="0"/>
-                <a:ea typeface="Calibri" pitchFamily="34" charset="-122"/>
-                <a:cs typeface="Calibri" pitchFamily="34" charset="-120"/>
-              </a:rPr>
-              <a:t>21</a:t>
-            </a:r>
-            <a:endParaRPr lang="en-US" sz="900" dirty="0"/>
+          <p:cNvPr id="8" name="cuinotes-footer-mark"/>
+          <p:cNvSpPr txBox="1"/>
+          <p:nvPr/>
+        </p:nvSpPr>
+        <p:spPr>
+          <a:xfrm>
+            <a:off x="9951720" y="6455664"/>
+            <a:ext cx="2011680" cy="292608"/>
+          </a:xfrm>
+          <a:prstGeom prst="rect">
+            <a:avLst/>
+          </a:prstGeom>
+          <a:noFill/>
+        </p:spPr>
+        <p:txBody>
+          <a:bodyPr wrap="none" lIns="0" rIns="0" tIns="0" bIns="0">
+            <a:spAutoFit/>
+          </a:bodyPr>
+          <a:lstStyle/>
+          <a:p>
+            <a:pPr algn="r"/>
+            <a:r>
+              <a:rPr sz="1000">
+                <a:solidFill>
+                  <a:srgbClr val="8A939B"/>
+                </a:solidFill>
+                <a:hlinkClick r:id="rId3"/>
+              </a:rPr>
+              <a:t>cuinotes.com</a:t>
+            </a:r>
+            <a:r>
+              <a:rPr sz="1000">
+                <a:solidFill>
+                  <a:srgbClr val="8A939B"/>
+                </a:solidFill>
+              </a:rPr>
+              <a:t>  ·  21</a:t>
+            </a:r>
           </a:p>
         </p:txBody>
       </p:sp>
@@ -9032,6 +8626,10 @@
             <a:tailEnd type="triangle"/>
           </a:ln>
         </p:spPr>
+        <p:txBody>
+          <a:bodyPr/>
+          <a:p/>
+        </p:txBody>
       </p:sp>
       <p:sp>
         <p:nvSpPr>
@@ -9110,6 +8708,10 @@
           </a:solidFill>
           <a:ln/>
         </p:spPr>
+        <p:txBody>
+          <a:bodyPr/>
+          <a:p/>
+        </p:txBody>
       </p:sp>
       <p:sp>
         <p:nvSpPr>
@@ -9241,6 +8843,10 @@
           </a:solidFill>
           <a:ln/>
         </p:spPr>
+        <p:txBody>
+          <a:bodyPr/>
+          <a:p/>
+        </p:txBody>
       </p:sp>
       <p:sp>
         <p:nvSpPr>
@@ -9414,79 +9020,44 @@
       </p:sp>
       <p:sp>
         <p:nvSpPr>
-          <p:cNvPr id="11" name="Text 9"/>
-          <p:cNvSpPr txBox="1"/>
-          <p:nvPr/>
-        </p:nvSpPr>
-        <p:spPr>
-          <a:xfrm>
-            <a:off x="640080" y="6446520"/>
-            <a:ext cx="8686800" cy="292608"/>
-          </a:xfrm>
-          <a:prstGeom prst="rect">
-            <a:avLst/>
-          </a:prstGeom>
-          <a:noFill/>
-          <a:ln/>
-        </p:spPr>
-        <p:txBody>
-          <a:bodyPr wrap="square" lIns="0" tIns="0" rIns="0" bIns="0" rtlCol="0" anchor="ctr"/>
-          <a:lstStyle/>
-          <a:p>
-            <a:pPr algn="l" indent="0" marL="0">
-              <a:buNone/>
-            </a:pPr>
-            <a:r>
-              <a:rPr lang="en-US" sz="900" dirty="0">
-                <a:solidFill>
-                  <a:srgbClr val="5D5D72"/>
-                </a:solidFill>
-                <a:latin typeface="Calibri" pitchFamily="34" charset="0"/>
-                <a:ea typeface="Calibri" pitchFamily="34" charset="-122"/>
-                <a:cs typeface="Calibri" pitchFamily="34" charset="-120"/>
-              </a:rPr>
-              <a:t>Usman Akram  •  COMSATS University Islamabad</a:t>
-            </a:r>
-            <a:endParaRPr lang="en-US" sz="900" dirty="0"/>
-          </a:p>
-        </p:txBody>
-      </p:sp>
-      <p:sp>
-        <p:nvSpPr>
-          <p:cNvPr id="12" name="Text 10"/>
-          <p:cNvSpPr txBox="1"/>
-          <p:nvPr/>
-        </p:nvSpPr>
-        <p:spPr>
-          <a:xfrm>
-            <a:off x="11155680" y="6446520"/>
-            <a:ext cx="457200" cy="292608"/>
-          </a:xfrm>
-          <a:prstGeom prst="rect">
-            <a:avLst/>
-          </a:prstGeom>
-          <a:noFill/>
-          <a:ln/>
-        </p:spPr>
-        <p:txBody>
-          <a:bodyPr wrap="square" lIns="0" tIns="0" rIns="0" bIns="0" rtlCol="0" anchor="ctr"/>
-          <a:lstStyle/>
-          <a:p>
-            <a:pPr algn="r" indent="0" marL="0">
-              <a:buNone/>
-            </a:pPr>
-            <a:r>
-              <a:rPr lang="en-US" sz="900" dirty="0">
-                <a:solidFill>
-                  <a:srgbClr val="5D5D72"/>
-                </a:solidFill>
-                <a:latin typeface="Calibri" pitchFamily="34" charset="0"/>
-                <a:ea typeface="Calibri" pitchFamily="34" charset="-122"/>
-                <a:cs typeface="Calibri" pitchFamily="34" charset="-120"/>
-              </a:rPr>
-              <a:t>22</a:t>
-            </a:r>
-            <a:endParaRPr lang="en-US" sz="900" dirty="0"/>
+          <p:cNvPr id="13" name="cuinotes-footer-mark"/>
+          <p:cNvSpPr txBox="1"/>
+          <p:nvPr/>
+        </p:nvSpPr>
+        <p:spPr>
+          <a:xfrm>
+            <a:off x="9951720" y="6455664"/>
+            <a:ext cx="2011680" cy="292608"/>
+          </a:xfrm>
+          <a:prstGeom prst="rect">
+            <a:avLst/>
+          </a:prstGeom>
+          <a:noFill/>
+        </p:spPr>
+        <p:txBody>
+          <a:bodyPr wrap="none" lIns="0" rIns="0" tIns="0" bIns="0">
+            <a:spAutoFit/>
+          </a:bodyPr>
+          <a:lstStyle/>
+          <a:p>
+            <a:pPr algn="r"/>
+            <a:r>
+              <a:rPr sz="1000">
+                <a:solidFill>
+                  <a:srgbClr val="8A939B"/>
+                </a:solidFill>
+                <a:hlinkClick r:id="rId3"/>
+              </a:rPr>
+              <a:t>cuinotes.com</a:t>
+            </a:r>
+            <a:r>
+              <a:rPr sz="1000">
+                <a:solidFill>
+                  <a:srgbClr val="8A939B"/>
+                </a:solidFill>
+              </a:rPr>
+              <a:t>  ·  22</a:t>
+            </a:r>
           </a:p>
         </p:txBody>
       </p:sp>
@@ -9626,6 +9197,10 @@
             <a:prstDash val="solid"/>
           </a:ln>
         </p:spPr>
+        <p:txBody>
+          <a:bodyPr/>
+          <a:p/>
+        </p:txBody>
       </p:sp>
       <p:sp>
         <p:nvSpPr>
@@ -9707,79 +9282,44 @@
       </p:sp>
       <p:sp>
         <p:nvSpPr>
-          <p:cNvPr id="7" name="Text 5"/>
-          <p:cNvSpPr txBox="1"/>
-          <p:nvPr/>
-        </p:nvSpPr>
-        <p:spPr>
-          <a:xfrm>
-            <a:off x="640080" y="6446520"/>
-            <a:ext cx="8686800" cy="292608"/>
-          </a:xfrm>
-          <a:prstGeom prst="rect">
-            <a:avLst/>
-          </a:prstGeom>
-          <a:noFill/>
-          <a:ln/>
-        </p:spPr>
-        <p:txBody>
-          <a:bodyPr wrap="square" lIns="0" tIns="0" rIns="0" bIns="0" rtlCol="0" anchor="ctr"/>
-          <a:lstStyle/>
-          <a:p>
-            <a:pPr algn="l" indent="0" marL="0">
-              <a:buNone/>
-            </a:pPr>
-            <a:r>
-              <a:rPr lang="en-US" sz="900" dirty="0">
-                <a:solidFill>
-                  <a:srgbClr val="5D5D72"/>
-                </a:solidFill>
-                <a:latin typeface="Calibri" pitchFamily="34" charset="0"/>
-                <a:ea typeface="Calibri" pitchFamily="34" charset="-122"/>
-                <a:cs typeface="Calibri" pitchFamily="34" charset="-120"/>
-              </a:rPr>
-              <a:t>Usman Akram  •  COMSATS University Islamabad</a:t>
-            </a:r>
-            <a:endParaRPr lang="en-US" sz="900" dirty="0"/>
-          </a:p>
-        </p:txBody>
-      </p:sp>
-      <p:sp>
-        <p:nvSpPr>
-          <p:cNvPr id="8" name="Text 6"/>
-          <p:cNvSpPr txBox="1"/>
-          <p:nvPr/>
-        </p:nvSpPr>
-        <p:spPr>
-          <a:xfrm>
-            <a:off x="11155680" y="6446520"/>
-            <a:ext cx="457200" cy="292608"/>
-          </a:xfrm>
-          <a:prstGeom prst="rect">
-            <a:avLst/>
-          </a:prstGeom>
-          <a:noFill/>
-          <a:ln/>
-        </p:spPr>
-        <p:txBody>
-          <a:bodyPr wrap="square" lIns="0" tIns="0" rIns="0" bIns="0" rtlCol="0" anchor="ctr"/>
-          <a:lstStyle/>
-          <a:p>
-            <a:pPr algn="r" indent="0" marL="0">
-              <a:buNone/>
-            </a:pPr>
-            <a:r>
-              <a:rPr lang="en-US" sz="900" dirty="0">
-                <a:solidFill>
-                  <a:srgbClr val="5D5D72"/>
-                </a:solidFill>
-                <a:latin typeface="Calibri" pitchFamily="34" charset="0"/>
-                <a:ea typeface="Calibri" pitchFamily="34" charset="-122"/>
-                <a:cs typeface="Calibri" pitchFamily="34" charset="-120"/>
-              </a:rPr>
-              <a:t>23</a:t>
-            </a:r>
-            <a:endParaRPr lang="en-US" sz="900" dirty="0"/>
+          <p:cNvPr id="9" name="cuinotes-footer-mark"/>
+          <p:cNvSpPr txBox="1"/>
+          <p:nvPr/>
+        </p:nvSpPr>
+        <p:spPr>
+          <a:xfrm>
+            <a:off x="9951720" y="6455664"/>
+            <a:ext cx="2011680" cy="292608"/>
+          </a:xfrm>
+          <a:prstGeom prst="rect">
+            <a:avLst/>
+          </a:prstGeom>
+          <a:noFill/>
+        </p:spPr>
+        <p:txBody>
+          <a:bodyPr wrap="none" lIns="0" rIns="0" tIns="0" bIns="0">
+            <a:spAutoFit/>
+          </a:bodyPr>
+          <a:lstStyle/>
+          <a:p>
+            <a:pPr algn="r"/>
+            <a:r>
+              <a:rPr sz="1000">
+                <a:solidFill>
+                  <a:srgbClr val="8A939B"/>
+                </a:solidFill>
+                <a:hlinkClick r:id="rId3"/>
+              </a:rPr>
+              <a:t>cuinotes.com</a:t>
+            </a:r>
+            <a:r>
+              <a:rPr sz="1000">
+                <a:solidFill>
+                  <a:srgbClr val="8A939B"/>
+                </a:solidFill>
+              </a:rPr>
+              <a:t>  ·  23</a:t>
+            </a:r>
           </a:p>
         </p:txBody>
       </p:sp>
@@ -9912,6 +9452,10 @@
           </a:solidFill>
           <a:ln/>
         </p:spPr>
+        <p:txBody>
+          <a:bodyPr/>
+          <a:p/>
+        </p:txBody>
       </p:sp>
       <p:sp>
         <p:nvSpPr>
@@ -10010,6 +9554,10 @@
           </a:solidFill>
           <a:ln/>
         </p:spPr>
+        <p:txBody>
+          <a:bodyPr/>
+          <a:p/>
+        </p:txBody>
       </p:sp>
       <p:sp>
         <p:nvSpPr>
@@ -10108,6 +9656,10 @@
           </a:solidFill>
           <a:ln/>
         </p:spPr>
+        <p:txBody>
+          <a:bodyPr/>
+          <a:p/>
+        </p:txBody>
       </p:sp>
       <p:sp>
         <p:nvSpPr>
@@ -10206,6 +9758,10 @@
           </a:solidFill>
           <a:ln/>
         </p:spPr>
+        <p:txBody>
+          <a:bodyPr/>
+          <a:p/>
+        </p:txBody>
       </p:sp>
       <p:sp>
         <p:nvSpPr>
@@ -10287,79 +9843,44 @@
       </p:sp>
       <p:sp>
         <p:nvSpPr>
-          <p:cNvPr id="16" name="Text 14"/>
-          <p:cNvSpPr txBox="1"/>
-          <p:nvPr/>
-        </p:nvSpPr>
-        <p:spPr>
-          <a:xfrm>
-            <a:off x="640080" y="6446520"/>
-            <a:ext cx="8686800" cy="292608"/>
-          </a:xfrm>
-          <a:prstGeom prst="rect">
-            <a:avLst/>
-          </a:prstGeom>
-          <a:noFill/>
-          <a:ln/>
-        </p:spPr>
-        <p:txBody>
-          <a:bodyPr wrap="square" lIns="0" tIns="0" rIns="0" bIns="0" rtlCol="0" anchor="ctr"/>
-          <a:lstStyle/>
-          <a:p>
-            <a:pPr algn="l" indent="0" marL="0">
-              <a:buNone/>
-            </a:pPr>
-            <a:r>
-              <a:rPr lang="en-US" sz="900" dirty="0">
-                <a:solidFill>
-                  <a:srgbClr val="5D5D72"/>
-                </a:solidFill>
-                <a:latin typeface="Calibri" pitchFamily="34" charset="0"/>
-                <a:ea typeface="Calibri" pitchFamily="34" charset="-122"/>
-                <a:cs typeface="Calibri" pitchFamily="34" charset="-120"/>
-              </a:rPr>
-              <a:t>Usman Akram  •  COMSATS University Islamabad</a:t>
-            </a:r>
-            <a:endParaRPr lang="en-US" sz="900" dirty="0"/>
-          </a:p>
-        </p:txBody>
-      </p:sp>
-      <p:sp>
-        <p:nvSpPr>
-          <p:cNvPr id="17" name="Text 15"/>
-          <p:cNvSpPr txBox="1"/>
-          <p:nvPr/>
-        </p:nvSpPr>
-        <p:spPr>
-          <a:xfrm>
-            <a:off x="11155680" y="6446520"/>
-            <a:ext cx="457200" cy="292608"/>
-          </a:xfrm>
-          <a:prstGeom prst="rect">
-            <a:avLst/>
-          </a:prstGeom>
-          <a:noFill/>
-          <a:ln/>
-        </p:spPr>
-        <p:txBody>
-          <a:bodyPr wrap="square" lIns="0" tIns="0" rIns="0" bIns="0" rtlCol="0" anchor="ctr"/>
-          <a:lstStyle/>
-          <a:p>
-            <a:pPr algn="r" indent="0" marL="0">
-              <a:buNone/>
-            </a:pPr>
-            <a:r>
-              <a:rPr lang="en-US" sz="900" dirty="0">
-                <a:solidFill>
-                  <a:srgbClr val="5D5D72"/>
-                </a:solidFill>
-                <a:latin typeface="Calibri" pitchFamily="34" charset="0"/>
-                <a:ea typeface="Calibri" pitchFamily="34" charset="-122"/>
-                <a:cs typeface="Calibri" pitchFamily="34" charset="-120"/>
-              </a:rPr>
-              <a:t>24</a:t>
-            </a:r>
-            <a:endParaRPr lang="en-US" sz="900" dirty="0"/>
+          <p:cNvPr id="18" name="cuinotes-footer-mark"/>
+          <p:cNvSpPr txBox="1"/>
+          <p:nvPr/>
+        </p:nvSpPr>
+        <p:spPr>
+          <a:xfrm>
+            <a:off x="9951720" y="6455664"/>
+            <a:ext cx="2011680" cy="292608"/>
+          </a:xfrm>
+          <a:prstGeom prst="rect">
+            <a:avLst/>
+          </a:prstGeom>
+          <a:noFill/>
+        </p:spPr>
+        <p:txBody>
+          <a:bodyPr wrap="none" lIns="0" rIns="0" tIns="0" bIns="0">
+            <a:spAutoFit/>
+          </a:bodyPr>
+          <a:lstStyle/>
+          <a:p>
+            <a:pPr algn="r"/>
+            <a:r>
+              <a:rPr sz="1000">
+                <a:solidFill>
+                  <a:srgbClr val="8A939B"/>
+                </a:solidFill>
+                <a:hlinkClick r:id="rId3"/>
+              </a:rPr>
+              <a:t>cuinotes.com</a:t>
+            </a:r>
+            <a:r>
+              <a:rPr sz="1000">
+                <a:solidFill>
+                  <a:srgbClr val="8A939B"/>
+                </a:solidFill>
+              </a:rPr>
+              <a:t>  ·  24</a:t>
+            </a:r>
           </a:p>
         </p:txBody>
       </p:sp>
@@ -10494,6 +10015,10 @@
           </a:solidFill>
           <a:ln/>
         </p:spPr>
+        <p:txBody>
+          <a:bodyPr/>
+          <a:p/>
+        </p:txBody>
       </p:sp>
       <p:sp>
         <p:nvSpPr>
@@ -10559,79 +10084,44 @@
       </p:sp>
       <p:sp>
         <p:nvSpPr>
-          <p:cNvPr id="6" name="Text 4"/>
-          <p:cNvSpPr txBox="1"/>
-          <p:nvPr/>
-        </p:nvSpPr>
-        <p:spPr>
-          <a:xfrm>
-            <a:off x="640080" y="6446520"/>
-            <a:ext cx="8686800" cy="292608"/>
-          </a:xfrm>
-          <a:prstGeom prst="rect">
-            <a:avLst/>
-          </a:prstGeom>
-          <a:noFill/>
-          <a:ln/>
-        </p:spPr>
-        <p:txBody>
-          <a:bodyPr wrap="square" lIns="0" tIns="0" rIns="0" bIns="0" rtlCol="0" anchor="ctr"/>
-          <a:lstStyle/>
-          <a:p>
-            <a:pPr algn="l" indent="0" marL="0">
-              <a:buNone/>
-            </a:pPr>
-            <a:r>
-              <a:rPr lang="en-US" sz="900" dirty="0">
-                <a:solidFill>
-                  <a:srgbClr val="5D5D72"/>
-                </a:solidFill>
-                <a:latin typeface="Calibri" pitchFamily="34" charset="0"/>
-                <a:ea typeface="Calibri" pitchFamily="34" charset="-122"/>
-                <a:cs typeface="Calibri" pitchFamily="34" charset="-120"/>
-              </a:rPr>
-              <a:t>Usman Akram  •  COMSATS University Islamabad</a:t>
-            </a:r>
-            <a:endParaRPr lang="en-US" sz="900" dirty="0"/>
-          </a:p>
-        </p:txBody>
-      </p:sp>
-      <p:sp>
-        <p:nvSpPr>
-          <p:cNvPr id="7" name="Text 5"/>
-          <p:cNvSpPr txBox="1"/>
-          <p:nvPr/>
-        </p:nvSpPr>
-        <p:spPr>
-          <a:xfrm>
-            <a:off x="11155680" y="6446520"/>
-            <a:ext cx="457200" cy="292608"/>
-          </a:xfrm>
-          <a:prstGeom prst="rect">
-            <a:avLst/>
-          </a:prstGeom>
-          <a:noFill/>
-          <a:ln/>
-        </p:spPr>
-        <p:txBody>
-          <a:bodyPr wrap="square" lIns="0" tIns="0" rIns="0" bIns="0" rtlCol="0" anchor="ctr"/>
-          <a:lstStyle/>
-          <a:p>
-            <a:pPr algn="r" indent="0" marL="0">
-              <a:buNone/>
-            </a:pPr>
-            <a:r>
-              <a:rPr lang="en-US" sz="900" dirty="0">
-                <a:solidFill>
-                  <a:srgbClr val="5D5D72"/>
-                </a:solidFill>
-                <a:latin typeface="Calibri" pitchFamily="34" charset="0"/>
-                <a:ea typeface="Calibri" pitchFamily="34" charset="-122"/>
-                <a:cs typeface="Calibri" pitchFamily="34" charset="-120"/>
-              </a:rPr>
-              <a:t>25</a:t>
-            </a:r>
-            <a:endParaRPr lang="en-US" sz="900" dirty="0"/>
+          <p:cNvPr id="8" name="cuinotes-footer-mark"/>
+          <p:cNvSpPr txBox="1"/>
+          <p:nvPr/>
+        </p:nvSpPr>
+        <p:spPr>
+          <a:xfrm>
+            <a:off x="9951720" y="6455664"/>
+            <a:ext cx="2011680" cy="292608"/>
+          </a:xfrm>
+          <a:prstGeom prst="rect">
+            <a:avLst/>
+          </a:prstGeom>
+          <a:noFill/>
+        </p:spPr>
+        <p:txBody>
+          <a:bodyPr wrap="none" lIns="0" rIns="0" tIns="0" bIns="0">
+            <a:spAutoFit/>
+          </a:bodyPr>
+          <a:lstStyle/>
+          <a:p>
+            <a:pPr algn="r"/>
+            <a:r>
+              <a:rPr sz="1000">
+                <a:solidFill>
+                  <a:srgbClr val="8A939B"/>
+                </a:solidFill>
+                <a:hlinkClick r:id="rId3"/>
+              </a:rPr>
+              <a:t>cuinotes.com</a:t>
+            </a:r>
+            <a:r>
+              <a:rPr sz="1000">
+                <a:solidFill>
+                  <a:srgbClr val="8A939B"/>
+                </a:solidFill>
+              </a:rPr>
+              <a:t>  ·  25</a:t>
+            </a:r>
           </a:p>
         </p:txBody>
       </p:sp>
@@ -10766,6 +10256,10 @@
           </a:solidFill>
           <a:ln/>
         </p:spPr>
+        <p:txBody>
+          <a:bodyPr/>
+          <a:p/>
+        </p:txBody>
       </p:sp>
       <p:sp>
         <p:nvSpPr>
@@ -11031,79 +10525,44 @@
       </p:sp>
       <p:sp>
         <p:nvSpPr>
-          <p:cNvPr id="6" name="Text 4"/>
-          <p:cNvSpPr txBox="1"/>
-          <p:nvPr/>
-        </p:nvSpPr>
-        <p:spPr>
-          <a:xfrm>
-            <a:off x="640080" y="6446520"/>
-            <a:ext cx="8686800" cy="292608"/>
-          </a:xfrm>
-          <a:prstGeom prst="rect">
-            <a:avLst/>
-          </a:prstGeom>
-          <a:noFill/>
-          <a:ln/>
-        </p:spPr>
-        <p:txBody>
-          <a:bodyPr wrap="square" lIns="0" tIns="0" rIns="0" bIns="0" rtlCol="0" anchor="ctr"/>
-          <a:lstStyle/>
-          <a:p>
-            <a:pPr algn="l" indent="0" marL="0">
-              <a:buNone/>
-            </a:pPr>
-            <a:r>
-              <a:rPr lang="en-US" sz="900" dirty="0">
-                <a:solidFill>
-                  <a:srgbClr val="5D5D72"/>
-                </a:solidFill>
-                <a:latin typeface="Calibri" pitchFamily="34" charset="0"/>
-                <a:ea typeface="Calibri" pitchFamily="34" charset="-122"/>
-                <a:cs typeface="Calibri" pitchFamily="34" charset="-120"/>
-              </a:rPr>
-              <a:t>Usman Akram  •  COMSATS University Islamabad</a:t>
-            </a:r>
-            <a:endParaRPr lang="en-US" sz="900" dirty="0"/>
-          </a:p>
-        </p:txBody>
-      </p:sp>
-      <p:sp>
-        <p:nvSpPr>
-          <p:cNvPr id="7" name="Text 5"/>
-          <p:cNvSpPr txBox="1"/>
-          <p:nvPr/>
-        </p:nvSpPr>
-        <p:spPr>
-          <a:xfrm>
-            <a:off x="11155680" y="6446520"/>
-            <a:ext cx="457200" cy="292608"/>
-          </a:xfrm>
-          <a:prstGeom prst="rect">
-            <a:avLst/>
-          </a:prstGeom>
-          <a:noFill/>
-          <a:ln/>
-        </p:spPr>
-        <p:txBody>
-          <a:bodyPr wrap="square" lIns="0" tIns="0" rIns="0" bIns="0" rtlCol="0" anchor="ctr"/>
-          <a:lstStyle/>
-          <a:p>
-            <a:pPr algn="r" indent="0" marL="0">
-              <a:buNone/>
-            </a:pPr>
-            <a:r>
-              <a:rPr lang="en-US" sz="900" dirty="0">
-                <a:solidFill>
-                  <a:srgbClr val="5D5D72"/>
-                </a:solidFill>
-                <a:latin typeface="Calibri" pitchFamily="34" charset="0"/>
-                <a:ea typeface="Calibri" pitchFamily="34" charset="-122"/>
-                <a:cs typeface="Calibri" pitchFamily="34" charset="-120"/>
-              </a:rPr>
-              <a:t>26</a:t>
-            </a:r>
-            <a:endParaRPr lang="en-US" sz="900" dirty="0"/>
+          <p:cNvPr id="8" name="cuinotes-footer-mark"/>
+          <p:cNvSpPr txBox="1"/>
+          <p:nvPr/>
+        </p:nvSpPr>
+        <p:spPr>
+          <a:xfrm>
+            <a:off x="9951720" y="6455664"/>
+            <a:ext cx="2011680" cy="292608"/>
+          </a:xfrm>
+          <a:prstGeom prst="rect">
+            <a:avLst/>
+          </a:prstGeom>
+          <a:noFill/>
+        </p:spPr>
+        <p:txBody>
+          <a:bodyPr wrap="none" lIns="0" rIns="0" tIns="0" bIns="0">
+            <a:spAutoFit/>
+          </a:bodyPr>
+          <a:lstStyle/>
+          <a:p>
+            <a:pPr algn="r"/>
+            <a:r>
+              <a:rPr sz="1000">
+                <a:solidFill>
+                  <a:srgbClr val="8A939B"/>
+                </a:solidFill>
+                <a:hlinkClick r:id="rId3"/>
+              </a:rPr>
+              <a:t>cuinotes.com</a:t>
+            </a:r>
+            <a:r>
+              <a:rPr sz="1000">
+                <a:solidFill>
+                  <a:srgbClr val="8A939B"/>
+                </a:solidFill>
+              </a:rPr>
+              <a:t>  ·  26</a:t>
+            </a:r>
           </a:p>
         </p:txBody>
       </p:sp>
@@ -11939,79 +11398,44 @@
       </p:graphicFrame>
       <p:sp>
         <p:nvSpPr>
-          <p:cNvPr id="5" name="Text 2"/>
-          <p:cNvSpPr txBox="1"/>
-          <p:nvPr/>
-        </p:nvSpPr>
-        <p:spPr>
-          <a:xfrm>
-            <a:off x="640080" y="6446520"/>
-            <a:ext cx="8686800" cy="292608"/>
-          </a:xfrm>
-          <a:prstGeom prst="rect">
-            <a:avLst/>
-          </a:prstGeom>
-          <a:noFill/>
-          <a:ln/>
-        </p:spPr>
-        <p:txBody>
-          <a:bodyPr wrap="square" lIns="0" tIns="0" rIns="0" bIns="0" rtlCol="0" anchor="ctr"/>
-          <a:lstStyle/>
-          <a:p>
-            <a:pPr algn="l" indent="0" marL="0">
-              <a:buNone/>
-            </a:pPr>
-            <a:r>
-              <a:rPr lang="en-US" sz="900" dirty="0">
-                <a:solidFill>
-                  <a:srgbClr val="5D5D72"/>
-                </a:solidFill>
-                <a:latin typeface="Calibri" pitchFamily="34" charset="0"/>
-                <a:ea typeface="Calibri" pitchFamily="34" charset="-122"/>
-                <a:cs typeface="Calibri" pitchFamily="34" charset="-120"/>
-              </a:rPr>
-              <a:t>Usman Akram  •  COMSATS University Islamabad</a:t>
-            </a:r>
-            <a:endParaRPr lang="en-US" sz="900" dirty="0"/>
-          </a:p>
-        </p:txBody>
-      </p:sp>
-      <p:sp>
-        <p:nvSpPr>
-          <p:cNvPr id="6" name="Text 3"/>
-          <p:cNvSpPr txBox="1"/>
-          <p:nvPr/>
-        </p:nvSpPr>
-        <p:spPr>
-          <a:xfrm>
-            <a:off x="11155680" y="6446520"/>
-            <a:ext cx="457200" cy="292608"/>
-          </a:xfrm>
-          <a:prstGeom prst="rect">
-            <a:avLst/>
-          </a:prstGeom>
-          <a:noFill/>
-          <a:ln/>
-        </p:spPr>
-        <p:txBody>
-          <a:bodyPr wrap="square" lIns="0" tIns="0" rIns="0" bIns="0" rtlCol="0" anchor="ctr"/>
-          <a:lstStyle/>
-          <a:p>
-            <a:pPr algn="r" indent="0" marL="0">
-              <a:buNone/>
-            </a:pPr>
-            <a:r>
-              <a:rPr lang="en-US" sz="900" dirty="0">
-                <a:solidFill>
-                  <a:srgbClr val="5D5D72"/>
-                </a:solidFill>
-                <a:latin typeface="Calibri" pitchFamily="34" charset="0"/>
-                <a:ea typeface="Calibri" pitchFamily="34" charset="-122"/>
-                <a:cs typeface="Calibri" pitchFamily="34" charset="-120"/>
-              </a:rPr>
-              <a:t>27</a:t>
-            </a:r>
-            <a:endParaRPr lang="en-US" sz="900" dirty="0"/>
+          <p:cNvPr id="29" name="cuinotes-footer-mark"/>
+          <p:cNvSpPr txBox="1"/>
+          <p:nvPr/>
+        </p:nvSpPr>
+        <p:spPr>
+          <a:xfrm>
+            <a:off x="9951720" y="6455664"/>
+            <a:ext cx="2011680" cy="292608"/>
+          </a:xfrm>
+          <a:prstGeom prst="rect">
+            <a:avLst/>
+          </a:prstGeom>
+          <a:noFill/>
+        </p:spPr>
+        <p:txBody>
+          <a:bodyPr wrap="none" lIns="0" rIns="0" tIns="0" bIns="0">
+            <a:spAutoFit/>
+          </a:bodyPr>
+          <a:lstStyle/>
+          <a:p>
+            <a:pPr algn="r"/>
+            <a:r>
+              <a:rPr sz="1000">
+                <a:solidFill>
+                  <a:srgbClr val="8A939B"/>
+                </a:solidFill>
+                <a:hlinkClick r:id="rId3"/>
+              </a:rPr>
+              <a:t>cuinotes.com</a:t>
+            </a:r>
+            <a:r>
+              <a:rPr sz="1000">
+                <a:solidFill>
+                  <a:srgbClr val="8A939B"/>
+                </a:solidFill>
+              </a:rPr>
+              <a:t>  ·  27</a:t>
+            </a:r>
           </a:p>
         </p:txBody>
       </p:sp>
@@ -12151,6 +11575,10 @@
             <a:prstDash val="solid"/>
           </a:ln>
         </p:spPr>
+        <p:txBody>
+          <a:bodyPr/>
+          <a:p/>
+        </p:txBody>
       </p:sp>
       <p:sp>
         <p:nvSpPr>
@@ -12232,79 +11660,44 @@
       </p:sp>
       <p:sp>
         <p:nvSpPr>
-          <p:cNvPr id="7" name="Text 5"/>
-          <p:cNvSpPr txBox="1"/>
-          <p:nvPr/>
-        </p:nvSpPr>
-        <p:spPr>
-          <a:xfrm>
-            <a:off x="640080" y="6446520"/>
-            <a:ext cx="8686800" cy="292608"/>
-          </a:xfrm>
-          <a:prstGeom prst="rect">
-            <a:avLst/>
-          </a:prstGeom>
-          <a:noFill/>
-          <a:ln/>
-        </p:spPr>
-        <p:txBody>
-          <a:bodyPr wrap="square" lIns="0" tIns="0" rIns="0" bIns="0" rtlCol="0" anchor="ctr"/>
-          <a:lstStyle/>
-          <a:p>
-            <a:pPr algn="l" indent="0" marL="0">
-              <a:buNone/>
-            </a:pPr>
-            <a:r>
-              <a:rPr lang="en-US" sz="900" dirty="0">
-                <a:solidFill>
-                  <a:srgbClr val="5D5D72"/>
-                </a:solidFill>
-                <a:latin typeface="Calibri" pitchFamily="34" charset="0"/>
-                <a:ea typeface="Calibri" pitchFamily="34" charset="-122"/>
-                <a:cs typeface="Calibri" pitchFamily="34" charset="-120"/>
-              </a:rPr>
-              <a:t>Usman Akram  •  COMSATS University Islamabad</a:t>
-            </a:r>
-            <a:endParaRPr lang="en-US" sz="900" dirty="0"/>
-          </a:p>
-        </p:txBody>
-      </p:sp>
-      <p:sp>
-        <p:nvSpPr>
-          <p:cNvPr id="8" name="Text 6"/>
-          <p:cNvSpPr txBox="1"/>
-          <p:nvPr/>
-        </p:nvSpPr>
-        <p:spPr>
-          <a:xfrm>
-            <a:off x="11155680" y="6446520"/>
-            <a:ext cx="457200" cy="292608"/>
-          </a:xfrm>
-          <a:prstGeom prst="rect">
-            <a:avLst/>
-          </a:prstGeom>
-          <a:noFill/>
-          <a:ln/>
-        </p:spPr>
-        <p:txBody>
-          <a:bodyPr wrap="square" lIns="0" tIns="0" rIns="0" bIns="0" rtlCol="0" anchor="ctr"/>
-          <a:lstStyle/>
-          <a:p>
-            <a:pPr algn="r" indent="0" marL="0">
-              <a:buNone/>
-            </a:pPr>
-            <a:r>
-              <a:rPr lang="en-US" sz="900" dirty="0">
-                <a:solidFill>
-                  <a:srgbClr val="5D5D72"/>
-                </a:solidFill>
-                <a:latin typeface="Calibri" pitchFamily="34" charset="0"/>
-                <a:ea typeface="Calibri" pitchFamily="34" charset="-122"/>
-                <a:cs typeface="Calibri" pitchFamily="34" charset="-120"/>
-              </a:rPr>
-              <a:t>28</a:t>
-            </a:r>
-            <a:endParaRPr lang="en-US" sz="900" dirty="0"/>
+          <p:cNvPr id="9" name="cuinotes-footer-mark"/>
+          <p:cNvSpPr txBox="1"/>
+          <p:nvPr/>
+        </p:nvSpPr>
+        <p:spPr>
+          <a:xfrm>
+            <a:off x="9951720" y="6455664"/>
+            <a:ext cx="2011680" cy="292608"/>
+          </a:xfrm>
+          <a:prstGeom prst="rect">
+            <a:avLst/>
+          </a:prstGeom>
+          <a:noFill/>
+        </p:spPr>
+        <p:txBody>
+          <a:bodyPr wrap="none" lIns="0" rIns="0" tIns="0" bIns="0">
+            <a:spAutoFit/>
+          </a:bodyPr>
+          <a:lstStyle/>
+          <a:p>
+            <a:pPr algn="r"/>
+            <a:r>
+              <a:rPr sz="1000">
+                <a:solidFill>
+                  <a:srgbClr val="8A939B"/>
+                </a:solidFill>
+                <a:hlinkClick r:id="rId3"/>
+              </a:rPr>
+              <a:t>cuinotes.com</a:t>
+            </a:r>
+            <a:r>
+              <a:rPr sz="1000">
+                <a:solidFill>
+                  <a:srgbClr val="8A939B"/>
+                </a:solidFill>
+              </a:rPr>
+              <a:t>  ·  28</a:t>
+            </a:r>
           </a:p>
         </p:txBody>
       </p:sp>
@@ -12437,6 +11830,10 @@
           </a:solidFill>
           <a:ln/>
         </p:spPr>
+        <p:txBody>
+          <a:bodyPr/>
+          <a:p/>
+        </p:txBody>
       </p:sp>
       <p:sp>
         <p:nvSpPr>
@@ -12535,6 +11932,10 @@
           </a:solidFill>
           <a:ln/>
         </p:spPr>
+        <p:txBody>
+          <a:bodyPr/>
+          <a:p/>
+        </p:txBody>
       </p:sp>
       <p:sp>
         <p:nvSpPr>
@@ -12633,6 +12034,10 @@
           </a:solidFill>
           <a:ln/>
         </p:spPr>
+        <p:txBody>
+          <a:bodyPr/>
+          <a:p/>
+        </p:txBody>
       </p:sp>
       <p:sp>
         <p:nvSpPr>
@@ -12731,6 +12136,10 @@
           </a:solidFill>
           <a:ln/>
         </p:spPr>
+        <p:txBody>
+          <a:bodyPr/>
+          <a:p/>
+        </p:txBody>
       </p:sp>
       <p:sp>
         <p:nvSpPr>
@@ -12829,6 +12238,10 @@
           </a:solidFill>
           <a:ln/>
         </p:spPr>
+        <p:txBody>
+          <a:bodyPr/>
+          <a:p/>
+        </p:txBody>
       </p:sp>
       <p:sp>
         <p:nvSpPr>
@@ -12927,6 +12340,10 @@
           </a:solidFill>
           <a:ln/>
         </p:spPr>
+        <p:txBody>
+          <a:bodyPr/>
+          <a:p/>
+        </p:txBody>
       </p:sp>
       <p:sp>
         <p:nvSpPr>
@@ -13008,79 +12425,44 @@
       </p:sp>
       <p:sp>
         <p:nvSpPr>
-          <p:cNvPr id="22" name="Text 20"/>
-          <p:cNvSpPr txBox="1"/>
-          <p:nvPr/>
-        </p:nvSpPr>
-        <p:spPr>
-          <a:xfrm>
-            <a:off x="640080" y="6446520"/>
-            <a:ext cx="8686800" cy="292608"/>
-          </a:xfrm>
-          <a:prstGeom prst="rect">
-            <a:avLst/>
-          </a:prstGeom>
-          <a:noFill/>
-          <a:ln/>
-        </p:spPr>
-        <p:txBody>
-          <a:bodyPr wrap="square" lIns="0" tIns="0" rIns="0" bIns="0" rtlCol="0" anchor="ctr"/>
-          <a:lstStyle/>
-          <a:p>
-            <a:pPr algn="l" indent="0" marL="0">
-              <a:buNone/>
-            </a:pPr>
-            <a:r>
-              <a:rPr lang="en-US" sz="900" dirty="0">
-                <a:solidFill>
-                  <a:srgbClr val="9AA3D8"/>
-                </a:solidFill>
-                <a:latin typeface="Calibri" pitchFamily="34" charset="0"/>
-                <a:ea typeface="Calibri" pitchFamily="34" charset="-122"/>
-                <a:cs typeface="Calibri" pitchFamily="34" charset="-120"/>
-              </a:rPr>
-              <a:t>Usman Akram  •  COMSATS University Islamabad</a:t>
-            </a:r>
-            <a:endParaRPr lang="en-US" sz="900" dirty="0"/>
-          </a:p>
-        </p:txBody>
-      </p:sp>
-      <p:sp>
-        <p:nvSpPr>
-          <p:cNvPr id="23" name="Text 21"/>
-          <p:cNvSpPr txBox="1"/>
-          <p:nvPr/>
-        </p:nvSpPr>
-        <p:spPr>
-          <a:xfrm>
-            <a:off x="11155680" y="6446520"/>
-            <a:ext cx="457200" cy="292608"/>
-          </a:xfrm>
-          <a:prstGeom prst="rect">
-            <a:avLst/>
-          </a:prstGeom>
-          <a:noFill/>
-          <a:ln/>
-        </p:spPr>
-        <p:txBody>
-          <a:bodyPr wrap="square" lIns="0" tIns="0" rIns="0" bIns="0" rtlCol="0" anchor="ctr"/>
-          <a:lstStyle/>
-          <a:p>
-            <a:pPr algn="r" indent="0" marL="0">
-              <a:buNone/>
-            </a:pPr>
-            <a:r>
-              <a:rPr lang="en-US" sz="900" dirty="0">
-                <a:solidFill>
-                  <a:srgbClr val="9AA3D8"/>
-                </a:solidFill>
-                <a:latin typeface="Calibri" pitchFamily="34" charset="0"/>
-                <a:ea typeface="Calibri" pitchFamily="34" charset="-122"/>
-                <a:cs typeface="Calibri" pitchFamily="34" charset="-120"/>
-              </a:rPr>
-              <a:t>29</a:t>
-            </a:r>
-            <a:endParaRPr lang="en-US" sz="900" dirty="0"/>
+          <p:cNvPr id="24" name="cuinotes-footer-mark"/>
+          <p:cNvSpPr txBox="1"/>
+          <p:nvPr/>
+        </p:nvSpPr>
+        <p:spPr>
+          <a:xfrm>
+            <a:off x="9951720" y="6455664"/>
+            <a:ext cx="2011680" cy="292608"/>
+          </a:xfrm>
+          <a:prstGeom prst="rect">
+            <a:avLst/>
+          </a:prstGeom>
+          <a:noFill/>
+        </p:spPr>
+        <p:txBody>
+          <a:bodyPr wrap="none" lIns="0" rIns="0" tIns="0" bIns="0">
+            <a:spAutoFit/>
+          </a:bodyPr>
+          <a:lstStyle/>
+          <a:p>
+            <a:pPr algn="r"/>
+            <a:r>
+              <a:rPr sz="1000">
+                <a:solidFill>
+                  <a:srgbClr val="8A939B"/>
+                </a:solidFill>
+                <a:hlinkClick r:id="rId3"/>
+              </a:rPr>
+              <a:t>cuinotes.com</a:t>
+            </a:r>
+            <a:r>
+              <a:rPr sz="1000">
+                <a:solidFill>
+                  <a:srgbClr val="8A939B"/>
+                </a:solidFill>
+              </a:rPr>
+              <a:t>  ·  29</a:t>
+            </a:r>
           </a:p>
         </p:txBody>
       </p:sp>
@@ -13213,6 +12595,10 @@
           </a:solidFill>
           <a:ln/>
         </p:spPr>
+        <p:txBody>
+          <a:bodyPr/>
+          <a:p/>
+        </p:txBody>
       </p:sp>
       <p:sp>
         <p:nvSpPr>
@@ -13311,6 +12697,10 @@
           </a:solidFill>
           <a:ln/>
         </p:spPr>
+        <p:txBody>
+          <a:bodyPr/>
+          <a:p/>
+        </p:txBody>
       </p:sp>
       <p:sp>
         <p:nvSpPr>
@@ -13409,6 +12799,10 @@
           </a:solidFill>
           <a:ln/>
         </p:spPr>
+        <p:txBody>
+          <a:bodyPr/>
+          <a:p/>
+        </p:txBody>
       </p:sp>
       <p:sp>
         <p:nvSpPr>
@@ -13507,6 +12901,10 @@
           </a:solidFill>
           <a:ln/>
         </p:spPr>
+        <p:txBody>
+          <a:bodyPr/>
+          <a:p/>
+        </p:txBody>
       </p:sp>
       <p:sp>
         <p:nvSpPr>
@@ -13588,79 +12986,44 @@
       </p:sp>
       <p:sp>
         <p:nvSpPr>
-          <p:cNvPr id="16" name="Text 14"/>
-          <p:cNvSpPr txBox="1"/>
-          <p:nvPr/>
-        </p:nvSpPr>
-        <p:spPr>
-          <a:xfrm>
-            <a:off x="640080" y="6446520"/>
-            <a:ext cx="8686800" cy="292608"/>
-          </a:xfrm>
-          <a:prstGeom prst="rect">
-            <a:avLst/>
-          </a:prstGeom>
-          <a:noFill/>
-          <a:ln/>
-        </p:spPr>
-        <p:txBody>
-          <a:bodyPr wrap="square" lIns="0" tIns="0" rIns="0" bIns="0" rtlCol="0" anchor="ctr"/>
-          <a:lstStyle/>
-          <a:p>
-            <a:pPr algn="l" indent="0" marL="0">
-              <a:buNone/>
-            </a:pPr>
-            <a:r>
-              <a:rPr lang="en-US" sz="900" dirty="0">
-                <a:solidFill>
-                  <a:srgbClr val="5D5D72"/>
-                </a:solidFill>
-                <a:latin typeface="Calibri" pitchFamily="34" charset="0"/>
-                <a:ea typeface="Calibri" pitchFamily="34" charset="-122"/>
-                <a:cs typeface="Calibri" pitchFamily="34" charset="-120"/>
-              </a:rPr>
-              <a:t>Usman Akram  •  COMSATS University Islamabad</a:t>
-            </a:r>
-            <a:endParaRPr lang="en-US" sz="900" dirty="0"/>
-          </a:p>
-        </p:txBody>
-      </p:sp>
-      <p:sp>
-        <p:nvSpPr>
-          <p:cNvPr id="17" name="Text 15"/>
-          <p:cNvSpPr txBox="1"/>
-          <p:nvPr/>
-        </p:nvSpPr>
-        <p:spPr>
-          <a:xfrm>
-            <a:off x="11155680" y="6446520"/>
-            <a:ext cx="457200" cy="292608"/>
-          </a:xfrm>
-          <a:prstGeom prst="rect">
-            <a:avLst/>
-          </a:prstGeom>
-          <a:noFill/>
-          <a:ln/>
-        </p:spPr>
-        <p:txBody>
-          <a:bodyPr wrap="square" lIns="0" tIns="0" rIns="0" bIns="0" rtlCol="0" anchor="ctr"/>
-          <a:lstStyle/>
-          <a:p>
-            <a:pPr algn="r" indent="0" marL="0">
-              <a:buNone/>
-            </a:pPr>
-            <a:r>
-              <a:rPr lang="en-US" sz="900" dirty="0">
-                <a:solidFill>
-                  <a:srgbClr val="5D5D72"/>
-                </a:solidFill>
-                <a:latin typeface="Calibri" pitchFamily="34" charset="0"/>
-                <a:ea typeface="Calibri" pitchFamily="34" charset="-122"/>
-                <a:cs typeface="Calibri" pitchFamily="34" charset="-120"/>
-              </a:rPr>
-              <a:t>3</a:t>
-            </a:r>
-            <a:endParaRPr lang="en-US" sz="900" dirty="0"/>
+          <p:cNvPr id="18" name="cuinotes-footer-mark"/>
+          <p:cNvSpPr txBox="1"/>
+          <p:nvPr/>
+        </p:nvSpPr>
+        <p:spPr>
+          <a:xfrm>
+            <a:off x="9951720" y="6455664"/>
+            <a:ext cx="2011680" cy="292608"/>
+          </a:xfrm>
+          <a:prstGeom prst="rect">
+            <a:avLst/>
+          </a:prstGeom>
+          <a:noFill/>
+        </p:spPr>
+        <p:txBody>
+          <a:bodyPr wrap="none" lIns="0" rIns="0" tIns="0" bIns="0">
+            <a:spAutoFit/>
+          </a:bodyPr>
+          <a:lstStyle/>
+          <a:p>
+            <a:pPr algn="r"/>
+            <a:r>
+              <a:rPr sz="1000">
+                <a:solidFill>
+                  <a:srgbClr val="8A939B"/>
+                </a:solidFill>
+                <a:hlinkClick r:id="rId3"/>
+              </a:rPr>
+              <a:t>cuinotes.com</a:t>
+            </a:r>
+            <a:r>
+              <a:rPr sz="1000">
+                <a:solidFill>
+                  <a:srgbClr val="8A939B"/>
+                </a:solidFill>
+              </a:rPr>
+              <a:t>  ·  3</a:t>
+            </a:r>
           </a:p>
         </p:txBody>
       </p:sp>
@@ -13795,6 +13158,10 @@
           </a:solidFill>
           <a:ln/>
         </p:spPr>
+        <p:txBody>
+          <a:bodyPr/>
+          <a:p/>
+        </p:txBody>
       </p:sp>
       <p:sp>
         <p:nvSpPr>
@@ -13892,6 +13259,10 @@
             <a:tailEnd type="triangle"/>
           </a:ln>
         </p:spPr>
+        <p:txBody>
+          <a:bodyPr/>
+          <a:p/>
+        </p:txBody>
       </p:sp>
       <p:sp>
         <p:nvSpPr>
@@ -13914,6 +13285,10 @@
           </a:solidFill>
           <a:ln/>
         </p:spPr>
+        <p:txBody>
+          <a:bodyPr/>
+          <a:p/>
+        </p:txBody>
       </p:sp>
       <p:sp>
         <p:nvSpPr>
@@ -14011,6 +13386,10 @@
             <a:tailEnd type="triangle"/>
           </a:ln>
         </p:spPr>
+        <p:txBody>
+          <a:bodyPr/>
+          <a:p/>
+        </p:txBody>
       </p:sp>
       <p:sp>
         <p:nvSpPr>
@@ -14033,6 +13412,10 @@
           </a:solidFill>
           <a:ln/>
         </p:spPr>
+        <p:txBody>
+          <a:bodyPr/>
+          <a:p/>
+        </p:txBody>
       </p:sp>
       <p:sp>
         <p:nvSpPr>
@@ -14113,6 +13496,10 @@
             <a:tailEnd type="triangle"/>
           </a:ln>
         </p:spPr>
+        <p:txBody>
+          <a:bodyPr/>
+          <a:p/>
+        </p:txBody>
       </p:sp>
       <p:sp>
         <p:nvSpPr>
@@ -14135,6 +13522,10 @@
           </a:solidFill>
           <a:ln/>
         </p:spPr>
+        <p:txBody>
+          <a:bodyPr/>
+          <a:p/>
+        </p:txBody>
       </p:sp>
       <p:sp>
         <p:nvSpPr>
@@ -14250,79 +13641,44 @@
       </p:sp>
       <p:sp>
         <p:nvSpPr>
-          <p:cNvPr id="16" name="Text 14"/>
-          <p:cNvSpPr txBox="1"/>
-          <p:nvPr/>
-        </p:nvSpPr>
-        <p:spPr>
-          <a:xfrm>
-            <a:off x="640080" y="6446520"/>
-            <a:ext cx="8686800" cy="292608"/>
-          </a:xfrm>
-          <a:prstGeom prst="rect">
-            <a:avLst/>
-          </a:prstGeom>
-          <a:noFill/>
-          <a:ln/>
-        </p:spPr>
-        <p:txBody>
-          <a:bodyPr wrap="square" lIns="0" tIns="0" rIns="0" bIns="0" rtlCol="0" anchor="ctr"/>
-          <a:lstStyle/>
-          <a:p>
-            <a:pPr algn="l" indent="0" marL="0">
-              <a:buNone/>
-            </a:pPr>
-            <a:r>
-              <a:rPr lang="en-US" sz="900" dirty="0">
-                <a:solidFill>
-                  <a:srgbClr val="5D5D72"/>
-                </a:solidFill>
-                <a:latin typeface="Calibri" pitchFamily="34" charset="0"/>
-                <a:ea typeface="Calibri" pitchFamily="34" charset="-122"/>
-                <a:cs typeface="Calibri" pitchFamily="34" charset="-120"/>
-              </a:rPr>
-              <a:t>Usman Akram  •  COMSATS University Islamabad</a:t>
-            </a:r>
-            <a:endParaRPr lang="en-US" sz="900" dirty="0"/>
-          </a:p>
-        </p:txBody>
-      </p:sp>
-      <p:sp>
-        <p:nvSpPr>
-          <p:cNvPr id="17" name="Text 15"/>
-          <p:cNvSpPr txBox="1"/>
-          <p:nvPr/>
-        </p:nvSpPr>
-        <p:spPr>
-          <a:xfrm>
-            <a:off x="11155680" y="6446520"/>
-            <a:ext cx="457200" cy="292608"/>
-          </a:xfrm>
-          <a:prstGeom prst="rect">
-            <a:avLst/>
-          </a:prstGeom>
-          <a:noFill/>
-          <a:ln/>
-        </p:spPr>
-        <p:txBody>
-          <a:bodyPr wrap="square" lIns="0" tIns="0" rIns="0" bIns="0" rtlCol="0" anchor="ctr"/>
-          <a:lstStyle/>
-          <a:p>
-            <a:pPr algn="r" indent="0" marL="0">
-              <a:buNone/>
-            </a:pPr>
-            <a:r>
-              <a:rPr lang="en-US" sz="900" dirty="0">
-                <a:solidFill>
-                  <a:srgbClr val="5D5D72"/>
-                </a:solidFill>
-                <a:latin typeface="Calibri" pitchFamily="34" charset="0"/>
-                <a:ea typeface="Calibri" pitchFamily="34" charset="-122"/>
-                <a:cs typeface="Calibri" pitchFamily="34" charset="-120"/>
-              </a:rPr>
-              <a:t>4</a:t>
-            </a:r>
-            <a:endParaRPr lang="en-US" sz="900" dirty="0"/>
+          <p:cNvPr id="18" name="cuinotes-footer-mark"/>
+          <p:cNvSpPr txBox="1"/>
+          <p:nvPr/>
+        </p:nvSpPr>
+        <p:spPr>
+          <a:xfrm>
+            <a:off x="9951720" y="6455664"/>
+            <a:ext cx="2011680" cy="292608"/>
+          </a:xfrm>
+          <a:prstGeom prst="rect">
+            <a:avLst/>
+          </a:prstGeom>
+          <a:noFill/>
+        </p:spPr>
+        <p:txBody>
+          <a:bodyPr wrap="none" lIns="0" rIns="0" tIns="0" bIns="0">
+            <a:spAutoFit/>
+          </a:bodyPr>
+          <a:lstStyle/>
+          <a:p>
+            <a:pPr algn="r"/>
+            <a:r>
+              <a:rPr sz="1000">
+                <a:solidFill>
+                  <a:srgbClr val="8A939B"/>
+                </a:solidFill>
+                <a:hlinkClick r:id="rId3"/>
+              </a:rPr>
+              <a:t>cuinotes.com</a:t>
+            </a:r>
+            <a:r>
+              <a:rPr sz="1000">
+                <a:solidFill>
+                  <a:srgbClr val="8A939B"/>
+                </a:solidFill>
+              </a:rPr>
+              <a:t>  ·  4</a:t>
+            </a:r>
           </a:p>
         </p:txBody>
       </p:sp>
@@ -14462,6 +13818,10 @@
             <a:prstDash val="solid"/>
           </a:ln>
         </p:spPr>
+        <p:txBody>
+          <a:bodyPr/>
+          <a:p/>
+        </p:txBody>
       </p:sp>
       <p:sp>
         <p:nvSpPr>
@@ -14613,6 +13973,10 @@
             <a:prstDash val="solid"/>
           </a:ln>
         </p:spPr>
+        <p:txBody>
+          <a:bodyPr/>
+          <a:p/>
+        </p:txBody>
       </p:sp>
       <p:sp>
         <p:nvSpPr>
@@ -14719,79 +14083,44 @@
       </p:sp>
       <p:sp>
         <p:nvSpPr>
-          <p:cNvPr id="10" name="Text 8"/>
-          <p:cNvSpPr txBox="1"/>
-          <p:nvPr/>
-        </p:nvSpPr>
-        <p:spPr>
-          <a:xfrm>
-            <a:off x="640080" y="6446520"/>
-            <a:ext cx="8686800" cy="292608"/>
-          </a:xfrm>
-          <a:prstGeom prst="rect">
-            <a:avLst/>
-          </a:prstGeom>
-          <a:noFill/>
-          <a:ln/>
-        </p:spPr>
-        <p:txBody>
-          <a:bodyPr wrap="square" lIns="0" tIns="0" rIns="0" bIns="0" rtlCol="0" anchor="ctr"/>
-          <a:lstStyle/>
-          <a:p>
-            <a:pPr algn="l" indent="0" marL="0">
-              <a:buNone/>
-            </a:pPr>
-            <a:r>
-              <a:rPr lang="en-US" sz="900" dirty="0">
-                <a:solidFill>
-                  <a:srgbClr val="5D5D72"/>
-                </a:solidFill>
-                <a:latin typeface="Calibri" pitchFamily="34" charset="0"/>
-                <a:ea typeface="Calibri" pitchFamily="34" charset="-122"/>
-                <a:cs typeface="Calibri" pitchFamily="34" charset="-120"/>
-              </a:rPr>
-              <a:t>Usman Akram  •  COMSATS University Islamabad</a:t>
-            </a:r>
-            <a:endParaRPr lang="en-US" sz="900" dirty="0"/>
-          </a:p>
-        </p:txBody>
-      </p:sp>
-      <p:sp>
-        <p:nvSpPr>
-          <p:cNvPr id="11" name="Text 9"/>
-          <p:cNvSpPr txBox="1"/>
-          <p:nvPr/>
-        </p:nvSpPr>
-        <p:spPr>
-          <a:xfrm>
-            <a:off x="11155680" y="6446520"/>
-            <a:ext cx="457200" cy="292608"/>
-          </a:xfrm>
-          <a:prstGeom prst="rect">
-            <a:avLst/>
-          </a:prstGeom>
-          <a:noFill/>
-          <a:ln/>
-        </p:spPr>
-        <p:txBody>
-          <a:bodyPr wrap="square" lIns="0" tIns="0" rIns="0" bIns="0" rtlCol="0" anchor="ctr"/>
-          <a:lstStyle/>
-          <a:p>
-            <a:pPr algn="r" indent="0" marL="0">
-              <a:buNone/>
-            </a:pPr>
-            <a:r>
-              <a:rPr lang="en-US" sz="900" dirty="0">
-                <a:solidFill>
-                  <a:srgbClr val="5D5D72"/>
-                </a:solidFill>
-                <a:latin typeface="Calibri" pitchFamily="34" charset="0"/>
-                <a:ea typeface="Calibri" pitchFamily="34" charset="-122"/>
-                <a:cs typeface="Calibri" pitchFamily="34" charset="-120"/>
-              </a:rPr>
-              <a:t>5</a:t>
-            </a:r>
-            <a:endParaRPr lang="en-US" sz="900" dirty="0"/>
+          <p:cNvPr id="12" name="cuinotes-footer-mark"/>
+          <p:cNvSpPr txBox="1"/>
+          <p:nvPr/>
+        </p:nvSpPr>
+        <p:spPr>
+          <a:xfrm>
+            <a:off x="9951720" y="6455664"/>
+            <a:ext cx="2011680" cy="292608"/>
+          </a:xfrm>
+          <a:prstGeom prst="rect">
+            <a:avLst/>
+          </a:prstGeom>
+          <a:noFill/>
+        </p:spPr>
+        <p:txBody>
+          <a:bodyPr wrap="none" lIns="0" rIns="0" tIns="0" bIns="0">
+            <a:spAutoFit/>
+          </a:bodyPr>
+          <a:lstStyle/>
+          <a:p>
+            <a:pPr algn="r"/>
+            <a:r>
+              <a:rPr sz="1000">
+                <a:solidFill>
+                  <a:srgbClr val="8A939B"/>
+                </a:solidFill>
+                <a:hlinkClick r:id="rId3"/>
+              </a:rPr>
+              <a:t>cuinotes.com</a:t>
+            </a:r>
+            <a:r>
+              <a:rPr sz="1000">
+                <a:solidFill>
+                  <a:srgbClr val="8A939B"/>
+                </a:solidFill>
+              </a:rPr>
+              <a:t>  ·  5</a:t>
+            </a:r>
           </a:p>
         </p:txBody>
       </p:sp>
@@ -14931,6 +14260,10 @@
             <a:prstDash val="solid"/>
           </a:ln>
         </p:spPr>
+        <p:txBody>
+          <a:bodyPr/>
+          <a:p/>
+        </p:txBody>
       </p:sp>
       <p:sp>
         <p:nvSpPr>
@@ -15012,79 +14345,44 @@
       </p:sp>
       <p:sp>
         <p:nvSpPr>
-          <p:cNvPr id="7" name="Text 5"/>
-          <p:cNvSpPr txBox="1"/>
-          <p:nvPr/>
-        </p:nvSpPr>
-        <p:spPr>
-          <a:xfrm>
-            <a:off x="640080" y="6446520"/>
-            <a:ext cx="8686800" cy="292608"/>
-          </a:xfrm>
-          <a:prstGeom prst="rect">
-            <a:avLst/>
-          </a:prstGeom>
-          <a:noFill/>
-          <a:ln/>
-        </p:spPr>
-        <p:txBody>
-          <a:bodyPr wrap="square" lIns="0" tIns="0" rIns="0" bIns="0" rtlCol="0" anchor="ctr"/>
-          <a:lstStyle/>
-          <a:p>
-            <a:pPr algn="l" indent="0" marL="0">
-              <a:buNone/>
-            </a:pPr>
-            <a:r>
-              <a:rPr lang="en-US" sz="900" dirty="0">
-                <a:solidFill>
-                  <a:srgbClr val="5D5D72"/>
-                </a:solidFill>
-                <a:latin typeface="Calibri" pitchFamily="34" charset="0"/>
-                <a:ea typeface="Calibri" pitchFamily="34" charset="-122"/>
-                <a:cs typeface="Calibri" pitchFamily="34" charset="-120"/>
-              </a:rPr>
-              <a:t>Usman Akram  •  COMSATS University Islamabad</a:t>
-            </a:r>
-            <a:endParaRPr lang="en-US" sz="900" dirty="0"/>
-          </a:p>
-        </p:txBody>
-      </p:sp>
-      <p:sp>
-        <p:nvSpPr>
-          <p:cNvPr id="8" name="Text 6"/>
-          <p:cNvSpPr txBox="1"/>
-          <p:nvPr/>
-        </p:nvSpPr>
-        <p:spPr>
-          <a:xfrm>
-            <a:off x="11155680" y="6446520"/>
-            <a:ext cx="457200" cy="292608"/>
-          </a:xfrm>
-          <a:prstGeom prst="rect">
-            <a:avLst/>
-          </a:prstGeom>
-          <a:noFill/>
-          <a:ln/>
-        </p:spPr>
-        <p:txBody>
-          <a:bodyPr wrap="square" lIns="0" tIns="0" rIns="0" bIns="0" rtlCol="0" anchor="ctr"/>
-          <a:lstStyle/>
-          <a:p>
-            <a:pPr algn="r" indent="0" marL="0">
-              <a:buNone/>
-            </a:pPr>
-            <a:r>
-              <a:rPr lang="en-US" sz="900" dirty="0">
-                <a:solidFill>
-                  <a:srgbClr val="5D5D72"/>
-                </a:solidFill>
-                <a:latin typeface="Calibri" pitchFamily="34" charset="0"/>
-                <a:ea typeface="Calibri" pitchFamily="34" charset="-122"/>
-                <a:cs typeface="Calibri" pitchFamily="34" charset="-120"/>
-              </a:rPr>
-              <a:t>6</a:t>
-            </a:r>
-            <a:endParaRPr lang="en-US" sz="900" dirty="0"/>
+          <p:cNvPr id="9" name="cuinotes-footer-mark"/>
+          <p:cNvSpPr txBox="1"/>
+          <p:nvPr/>
+        </p:nvSpPr>
+        <p:spPr>
+          <a:xfrm>
+            <a:off x="9951720" y="6455664"/>
+            <a:ext cx="2011680" cy="292608"/>
+          </a:xfrm>
+          <a:prstGeom prst="rect">
+            <a:avLst/>
+          </a:prstGeom>
+          <a:noFill/>
+        </p:spPr>
+        <p:txBody>
+          <a:bodyPr wrap="none" lIns="0" rIns="0" tIns="0" bIns="0">
+            <a:spAutoFit/>
+          </a:bodyPr>
+          <a:lstStyle/>
+          <a:p>
+            <a:pPr algn="r"/>
+            <a:r>
+              <a:rPr sz="1000">
+                <a:solidFill>
+                  <a:srgbClr val="8A939B"/>
+                </a:solidFill>
+                <a:hlinkClick r:id="rId3"/>
+              </a:rPr>
+              <a:t>cuinotes.com</a:t>
+            </a:r>
+            <a:r>
+              <a:rPr sz="1000">
+                <a:solidFill>
+                  <a:srgbClr val="8A939B"/>
+                </a:solidFill>
+              </a:rPr>
+              <a:t>  ·  6</a:t>
+            </a:r>
           </a:p>
         </p:txBody>
       </p:sp>
@@ -15217,6 +14515,10 @@
           </a:solidFill>
           <a:ln/>
         </p:spPr>
+        <p:txBody>
+          <a:bodyPr/>
+          <a:p/>
+        </p:txBody>
       </p:sp>
       <p:sp>
         <p:nvSpPr>
@@ -15315,6 +14617,10 @@
           </a:solidFill>
           <a:ln/>
         </p:spPr>
+        <p:txBody>
+          <a:bodyPr/>
+          <a:p/>
+        </p:txBody>
       </p:sp>
       <p:sp>
         <p:nvSpPr>
@@ -15413,6 +14719,10 @@
           </a:solidFill>
           <a:ln/>
         </p:spPr>
+        <p:txBody>
+          <a:bodyPr/>
+          <a:p/>
+        </p:txBody>
       </p:sp>
       <p:sp>
         <p:nvSpPr>
@@ -15494,79 +14804,44 @@
       </p:sp>
       <p:sp>
         <p:nvSpPr>
-          <p:cNvPr id="13" name="Text 11"/>
-          <p:cNvSpPr txBox="1"/>
-          <p:nvPr/>
-        </p:nvSpPr>
-        <p:spPr>
-          <a:xfrm>
-            <a:off x="640080" y="6446520"/>
-            <a:ext cx="8686800" cy="292608"/>
-          </a:xfrm>
-          <a:prstGeom prst="rect">
-            <a:avLst/>
-          </a:prstGeom>
-          <a:noFill/>
-          <a:ln/>
-        </p:spPr>
-        <p:txBody>
-          <a:bodyPr wrap="square" lIns="0" tIns="0" rIns="0" bIns="0" rtlCol="0" anchor="ctr"/>
-          <a:lstStyle/>
-          <a:p>
-            <a:pPr algn="l" indent="0" marL="0">
-              <a:buNone/>
-            </a:pPr>
-            <a:r>
-              <a:rPr lang="en-US" sz="900" dirty="0">
-                <a:solidFill>
-                  <a:srgbClr val="5D5D72"/>
-                </a:solidFill>
-                <a:latin typeface="Calibri" pitchFamily="34" charset="0"/>
-                <a:ea typeface="Calibri" pitchFamily="34" charset="-122"/>
-                <a:cs typeface="Calibri" pitchFamily="34" charset="-120"/>
-              </a:rPr>
-              <a:t>Usman Akram  •  COMSATS University Islamabad</a:t>
-            </a:r>
-            <a:endParaRPr lang="en-US" sz="900" dirty="0"/>
-          </a:p>
-        </p:txBody>
-      </p:sp>
-      <p:sp>
-        <p:nvSpPr>
-          <p:cNvPr id="14" name="Text 12"/>
-          <p:cNvSpPr txBox="1"/>
-          <p:nvPr/>
-        </p:nvSpPr>
-        <p:spPr>
-          <a:xfrm>
-            <a:off x="11155680" y="6446520"/>
-            <a:ext cx="457200" cy="292608"/>
-          </a:xfrm>
-          <a:prstGeom prst="rect">
-            <a:avLst/>
-          </a:prstGeom>
-          <a:noFill/>
-          <a:ln/>
-        </p:spPr>
-        <p:txBody>
-          <a:bodyPr wrap="square" lIns="0" tIns="0" rIns="0" bIns="0" rtlCol="0" anchor="ctr"/>
-          <a:lstStyle/>
-          <a:p>
-            <a:pPr algn="r" indent="0" marL="0">
-              <a:buNone/>
-            </a:pPr>
-            <a:r>
-              <a:rPr lang="en-US" sz="900" dirty="0">
-                <a:solidFill>
-                  <a:srgbClr val="5D5D72"/>
-                </a:solidFill>
-                <a:latin typeface="Calibri" pitchFamily="34" charset="0"/>
-                <a:ea typeface="Calibri" pitchFamily="34" charset="-122"/>
-                <a:cs typeface="Calibri" pitchFamily="34" charset="-120"/>
-              </a:rPr>
-              <a:t>7</a:t>
-            </a:r>
-            <a:endParaRPr lang="en-US" sz="900" dirty="0"/>
+          <p:cNvPr id="15" name="cuinotes-footer-mark"/>
+          <p:cNvSpPr txBox="1"/>
+          <p:nvPr/>
+        </p:nvSpPr>
+        <p:spPr>
+          <a:xfrm>
+            <a:off x="9951720" y="6455664"/>
+            <a:ext cx="2011680" cy="292608"/>
+          </a:xfrm>
+          <a:prstGeom prst="rect">
+            <a:avLst/>
+          </a:prstGeom>
+          <a:noFill/>
+        </p:spPr>
+        <p:txBody>
+          <a:bodyPr wrap="none" lIns="0" rIns="0" tIns="0" bIns="0">
+            <a:spAutoFit/>
+          </a:bodyPr>
+          <a:lstStyle/>
+          <a:p>
+            <a:pPr algn="r"/>
+            <a:r>
+              <a:rPr sz="1000">
+                <a:solidFill>
+                  <a:srgbClr val="8A939B"/>
+                </a:solidFill>
+                <a:hlinkClick r:id="rId3"/>
+              </a:rPr>
+              <a:t>cuinotes.com</a:t>
+            </a:r>
+            <a:r>
+              <a:rPr sz="1000">
+                <a:solidFill>
+                  <a:srgbClr val="8A939B"/>
+                </a:solidFill>
+              </a:rPr>
+              <a:t>  ·  7</a:t>
+            </a:r>
           </a:p>
         </p:txBody>
       </p:sp>
@@ -15701,6 +14976,10 @@
           </a:solidFill>
           <a:ln/>
         </p:spPr>
+        <p:txBody>
+          <a:bodyPr/>
+          <a:p/>
+        </p:txBody>
       </p:sp>
       <p:sp>
         <p:nvSpPr>
@@ -15835,79 +15114,44 @@
       </p:sp>
       <p:sp>
         <p:nvSpPr>
-          <p:cNvPr id="6" name="Text 4"/>
-          <p:cNvSpPr txBox="1"/>
-          <p:nvPr/>
-        </p:nvSpPr>
-        <p:spPr>
-          <a:xfrm>
-            <a:off x="640080" y="6446520"/>
-            <a:ext cx="8686800" cy="292608"/>
-          </a:xfrm>
-          <a:prstGeom prst="rect">
-            <a:avLst/>
-          </a:prstGeom>
-          <a:noFill/>
-          <a:ln/>
-        </p:spPr>
-        <p:txBody>
-          <a:bodyPr wrap="square" lIns="0" tIns="0" rIns="0" bIns="0" rtlCol="0" anchor="ctr"/>
-          <a:lstStyle/>
-          <a:p>
-            <a:pPr algn="l" indent="0" marL="0">
-              <a:buNone/>
-            </a:pPr>
-            <a:r>
-              <a:rPr lang="en-US" sz="900" dirty="0">
-                <a:solidFill>
-                  <a:srgbClr val="5D5D72"/>
-                </a:solidFill>
-                <a:latin typeface="Calibri" pitchFamily="34" charset="0"/>
-                <a:ea typeface="Calibri" pitchFamily="34" charset="-122"/>
-                <a:cs typeface="Calibri" pitchFamily="34" charset="-120"/>
-              </a:rPr>
-              <a:t>Usman Akram  •  COMSATS University Islamabad</a:t>
-            </a:r>
-            <a:endParaRPr lang="en-US" sz="900" dirty="0"/>
-          </a:p>
-        </p:txBody>
-      </p:sp>
-      <p:sp>
-        <p:nvSpPr>
-          <p:cNvPr id="7" name="Text 5"/>
-          <p:cNvSpPr txBox="1"/>
-          <p:nvPr/>
-        </p:nvSpPr>
-        <p:spPr>
-          <a:xfrm>
-            <a:off x="11155680" y="6446520"/>
-            <a:ext cx="457200" cy="292608"/>
-          </a:xfrm>
-          <a:prstGeom prst="rect">
-            <a:avLst/>
-          </a:prstGeom>
-          <a:noFill/>
-          <a:ln/>
-        </p:spPr>
-        <p:txBody>
-          <a:bodyPr wrap="square" lIns="0" tIns="0" rIns="0" bIns="0" rtlCol="0" anchor="ctr"/>
-          <a:lstStyle/>
-          <a:p>
-            <a:pPr algn="r" indent="0" marL="0">
-              <a:buNone/>
-            </a:pPr>
-            <a:r>
-              <a:rPr lang="en-US" sz="900" dirty="0">
-                <a:solidFill>
-                  <a:srgbClr val="5D5D72"/>
-                </a:solidFill>
-                <a:latin typeface="Calibri" pitchFamily="34" charset="0"/>
-                <a:ea typeface="Calibri" pitchFamily="34" charset="-122"/>
-                <a:cs typeface="Calibri" pitchFamily="34" charset="-120"/>
-              </a:rPr>
-              <a:t>8</a:t>
-            </a:r>
-            <a:endParaRPr lang="en-US" sz="900" dirty="0"/>
+          <p:cNvPr id="8" name="cuinotes-footer-mark"/>
+          <p:cNvSpPr txBox="1"/>
+          <p:nvPr/>
+        </p:nvSpPr>
+        <p:spPr>
+          <a:xfrm>
+            <a:off x="9951720" y="6455664"/>
+            <a:ext cx="2011680" cy="292608"/>
+          </a:xfrm>
+          <a:prstGeom prst="rect">
+            <a:avLst/>
+          </a:prstGeom>
+          <a:noFill/>
+        </p:spPr>
+        <p:txBody>
+          <a:bodyPr wrap="none" lIns="0" rIns="0" tIns="0" bIns="0">
+            <a:spAutoFit/>
+          </a:bodyPr>
+          <a:lstStyle/>
+          <a:p>
+            <a:pPr algn="r"/>
+            <a:r>
+              <a:rPr sz="1000">
+                <a:solidFill>
+                  <a:srgbClr val="8A939B"/>
+                </a:solidFill>
+                <a:hlinkClick r:id="rId3"/>
+              </a:rPr>
+              <a:t>cuinotes.com</a:t>
+            </a:r>
+            <a:r>
+              <a:rPr sz="1000">
+                <a:solidFill>
+                  <a:srgbClr val="8A939B"/>
+                </a:solidFill>
+              </a:rPr>
+              <a:t>  ·  8</a:t>
+            </a:r>
           </a:p>
         </p:txBody>
       </p:sp>
@@ -16042,6 +15286,10 @@
           </a:solidFill>
           <a:ln/>
         </p:spPr>
+        <p:txBody>
+          <a:bodyPr/>
+          <a:p/>
+        </p:txBody>
       </p:sp>
       <p:sp>
         <p:nvSpPr>
@@ -16265,79 +15513,44 @@
       </p:sp>
       <p:sp>
         <p:nvSpPr>
-          <p:cNvPr id="6" name="Text 4"/>
-          <p:cNvSpPr txBox="1"/>
-          <p:nvPr/>
-        </p:nvSpPr>
-        <p:spPr>
-          <a:xfrm>
-            <a:off x="640080" y="6446520"/>
-            <a:ext cx="8686800" cy="292608"/>
-          </a:xfrm>
-          <a:prstGeom prst="rect">
-            <a:avLst/>
-          </a:prstGeom>
-          <a:noFill/>
-          <a:ln/>
-        </p:spPr>
-        <p:txBody>
-          <a:bodyPr wrap="square" lIns="0" tIns="0" rIns="0" bIns="0" rtlCol="0" anchor="ctr"/>
-          <a:lstStyle/>
-          <a:p>
-            <a:pPr algn="l" indent="0" marL="0">
-              <a:buNone/>
-            </a:pPr>
-            <a:r>
-              <a:rPr lang="en-US" sz="900" dirty="0">
-                <a:solidFill>
-                  <a:srgbClr val="5D5D72"/>
-                </a:solidFill>
-                <a:latin typeface="Calibri" pitchFamily="34" charset="0"/>
-                <a:ea typeface="Calibri" pitchFamily="34" charset="-122"/>
-                <a:cs typeface="Calibri" pitchFamily="34" charset="-120"/>
-              </a:rPr>
-              <a:t>Usman Akram  •  COMSATS University Islamabad</a:t>
-            </a:r>
-            <a:endParaRPr lang="en-US" sz="900" dirty="0"/>
-          </a:p>
-        </p:txBody>
-      </p:sp>
-      <p:sp>
-        <p:nvSpPr>
-          <p:cNvPr id="7" name="Text 5"/>
-          <p:cNvSpPr txBox="1"/>
-          <p:nvPr/>
-        </p:nvSpPr>
-        <p:spPr>
-          <a:xfrm>
-            <a:off x="11155680" y="6446520"/>
-            <a:ext cx="457200" cy="292608"/>
-          </a:xfrm>
-          <a:prstGeom prst="rect">
-            <a:avLst/>
-          </a:prstGeom>
-          <a:noFill/>
-          <a:ln/>
-        </p:spPr>
-        <p:txBody>
-          <a:bodyPr wrap="square" lIns="0" tIns="0" rIns="0" bIns="0" rtlCol="0" anchor="ctr"/>
-          <a:lstStyle/>
-          <a:p>
-            <a:pPr algn="r" indent="0" marL="0">
-              <a:buNone/>
-            </a:pPr>
-            <a:r>
-              <a:rPr lang="en-US" sz="900" dirty="0">
-                <a:solidFill>
-                  <a:srgbClr val="5D5D72"/>
-                </a:solidFill>
-                <a:latin typeface="Calibri" pitchFamily="34" charset="0"/>
-                <a:ea typeface="Calibri" pitchFamily="34" charset="-122"/>
-                <a:cs typeface="Calibri" pitchFamily="34" charset="-120"/>
-              </a:rPr>
-              <a:t>9</a:t>
-            </a:r>
-            <a:endParaRPr lang="en-US" sz="900" dirty="0"/>
+          <p:cNvPr id="8" name="cuinotes-footer-mark"/>
+          <p:cNvSpPr txBox="1"/>
+          <p:nvPr/>
+        </p:nvSpPr>
+        <p:spPr>
+          <a:xfrm>
+            <a:off x="9951720" y="6455664"/>
+            <a:ext cx="2011680" cy="292608"/>
+          </a:xfrm>
+          <a:prstGeom prst="rect">
+            <a:avLst/>
+          </a:prstGeom>
+          <a:noFill/>
+        </p:spPr>
+        <p:txBody>
+          <a:bodyPr wrap="none" lIns="0" rIns="0" tIns="0" bIns="0">
+            <a:spAutoFit/>
+          </a:bodyPr>
+          <a:lstStyle/>
+          <a:p>
+            <a:pPr algn="r"/>
+            <a:r>
+              <a:rPr sz="1000">
+                <a:solidFill>
+                  <a:srgbClr val="8A939B"/>
+                </a:solidFill>
+                <a:hlinkClick r:id="rId3"/>
+              </a:rPr>
+              <a:t>cuinotes.com</a:t>
+            </a:r>
+            <a:r>
+              <a:rPr sz="1000">
+                <a:solidFill>
+                  <a:srgbClr val="8A939B"/>
+                </a:solidFill>
+              </a:rPr>
+              <a:t>  ·  9</a:t>
+            </a:r>
           </a:p>
         </p:txBody>
       </p:sp>

--- a/slides/CSC336-Lecture-23-Object-Relational-Mapping.pptx
+++ b/slides/CSC336-Lecture-23-Object-Relational-Mapping.pptx
@@ -4167,7 +4167,7 @@
         <p:spPr>
           <a:xfrm>
             <a:off x="640080" y="1965960"/>
-            <a:ext cx="10911535" cy="1554480"/>
+            <a:ext cx="10911535" cy="3657600"/>
           </a:xfrm>
           <a:prstGeom prst="roundRect">
             <a:avLst>
@@ -4198,7 +4198,7 @@
         <p:spPr>
           <a:xfrm>
             <a:off x="868680" y="2103120"/>
-            <a:ext cx="10454335" cy="274320"/>
+            <a:ext cx="10454335" cy="400000"/>
           </a:xfrm>
           <a:prstGeom prst="rect">
             <a:avLst/>
@@ -4214,7 +4214,7 @@
               <a:buNone/>
             </a:pPr>
             <a:r>
-              <a:rPr lang="en-US" sz="1000" b="1" spc="200" kern="0" dirty="0">
+              <a:rPr lang="en-US" sz="1800" b="1" spc="200" kern="0" dirty="0">
                 <a:solidFill>
                   <a:srgbClr val="1F7A46"/>
                 </a:solidFill>
@@ -4224,7 +4224,7 @@
               </a:rPr>
               <a:t>TIP</a:t>
             </a:r>
-            <a:endParaRPr lang="en-US" sz="1000" dirty="0"/>
+            <a:endParaRPr lang="en-US" sz="1800" dirty="0"/>
           </a:p>
         </p:txBody>
       </p:sp>
@@ -4236,24 +4236,24 @@
         </p:nvSpPr>
         <p:spPr>
           <a:xfrm>
-            <a:off x="868680" y="2404872"/>
-            <a:ext cx="10454335" cy="960120"/>
-          </a:xfrm>
-          <a:prstGeom prst="rect">
-            <a:avLst/>
-          </a:prstGeom>
-          <a:noFill/>
-          <a:ln/>
-        </p:spPr>
-        <p:txBody>
-          <a:bodyPr wrap="square" lIns="0" tIns="0" rIns="0" bIns="0" rtlCol="0" anchor="t"/>
+            <a:off x="868680" y="2795960"/>
+            <a:ext cx="10454335" cy="2500000"/>
+          </a:xfrm>
+          <a:prstGeom prst="rect">
+            <a:avLst/>
+          </a:prstGeom>
+          <a:noFill/>
+          <a:ln/>
+        </p:spPr>
+        <p:txBody>
+          <a:bodyPr wrap="square" lIns="0" tIns="0" rIns="0" bIns="0" rtlCol="0" anchor="ctr"/>
           <a:lstStyle/>
           <a:p>
             <a:pPr indent="0" marL="0">
               <a:buNone/>
             </a:pPr>
             <a:r>
-              <a:rPr lang="en-US" sz="1250" dirty="0">
+              <a:rPr lang="en-US" sz="2800" dirty="0">
                 <a:solidFill>
                   <a:srgbClr val="26262F"/>
                 </a:solidFill>
@@ -4263,7 +4263,7 @@
               </a:rPr>
               <a:t>Mongoose checks these rules every time you save() or create() a document, and throws a ValidationError if something doesn't match — free validation, no if statements needed for every field.</a:t>
             </a:r>
-            <a:endParaRPr lang="en-US" sz="1250" dirty="0"/>
+            <a:endParaRPr lang="en-US" sz="2800" dirty="0"/>
           </a:p>
         </p:txBody>
       </p:sp>
@@ -4437,9 +4437,13 @@
             </a:avLst>
           </a:prstGeom>
           <a:solidFill>
-            <a:srgbClr val="1E1E4C"/>
+            <a:srgbClr val="F7F8F9"/>
           </a:solidFill>
-          <a:ln/>
+          <a:ln w="9525">
+            <a:solidFill>
+              <a:srgbClr val="D0D5DD"/>
+            </a:solidFill>
+          </a:ln>
         </p:spPr>
         <p:txBody>
           <a:bodyPr/>
@@ -4476,7 +4480,7 @@
             <a:r>
               <a:rPr lang="en-US" sz="1400" dirty="0">
                 <a:solidFill>
-                  <a:srgbClr val="C9D3F5"/>
+                  <a:srgbClr val="1F2429"/>
                 </a:solidFill>
                 <a:latin typeface="Courier New" pitchFamily="34" charset="0"/>
                 <a:ea typeface="Courier New" pitchFamily="34" charset="-122"/>
@@ -4505,7 +4509,7 @@
             <a:r>
               <a:rPr lang="en-US" sz="1400" dirty="0">
                 <a:solidFill>
-                  <a:srgbClr val="C9D3F5"/>
+                  <a:srgbClr val="1F2429"/>
                 </a:solidFill>
                 <a:latin typeface="Courier New" pitchFamily="34" charset="0"/>
                 <a:ea typeface="Courier New" pitchFamily="34" charset="-122"/>
@@ -4525,7 +4529,7 @@
             <a:r>
               <a:rPr lang="en-US" sz="1400" dirty="0">
                 <a:solidFill>
-                  <a:srgbClr val="C9D3F5"/>
+                  <a:srgbClr val="1F2429"/>
                 </a:solidFill>
                 <a:latin typeface="Courier New" pitchFamily="34" charset="0"/>
                 <a:ea typeface="Courier New" pitchFamily="34" charset="-122"/>
@@ -4545,7 +4549,7 @@
             <a:r>
               <a:rPr lang="en-US" sz="1400" dirty="0">
                 <a:solidFill>
-                  <a:srgbClr val="C9D3F5"/>
+                  <a:srgbClr val="1F2429"/>
                 </a:solidFill>
                 <a:latin typeface="Courier New" pitchFamily="34" charset="0"/>
                 <a:ea typeface="Courier New" pitchFamily="34" charset="-122"/>
@@ -4565,7 +4569,7 @@
             <a:r>
               <a:rPr lang="en-US" sz="1400" dirty="0">
                 <a:solidFill>
-                  <a:srgbClr val="C9D3F5"/>
+                  <a:srgbClr val="1F2429"/>
                 </a:solidFill>
                 <a:latin typeface="Courier New" pitchFamily="34" charset="0"/>
                 <a:ea typeface="Courier New" pitchFamily="34" charset="-122"/>
@@ -4585,7 +4589,7 @@
             <a:r>
               <a:rPr lang="en-US" sz="1400" dirty="0">
                 <a:solidFill>
-                  <a:srgbClr val="C9D3F5"/>
+                  <a:srgbClr val="1F2429"/>
                 </a:solidFill>
                 <a:latin typeface="Courier New" pitchFamily="34" charset="0"/>
                 <a:ea typeface="Courier New" pitchFamily="34" charset="-122"/>
@@ -4806,9 +4810,13 @@
             </a:avLst>
           </a:prstGeom>
           <a:solidFill>
-            <a:srgbClr val="1E1E4C"/>
+            <a:srgbClr val="F7F8F9"/>
           </a:solidFill>
-          <a:ln/>
+          <a:ln w="9525">
+            <a:solidFill>
+              <a:srgbClr val="D0D5DD"/>
+            </a:solidFill>
+          </a:ln>
         </p:spPr>
         <p:txBody>
           <a:bodyPr/>
@@ -4845,7 +4853,7 @@
             <a:r>
               <a:rPr lang="en-US" sz="1400" dirty="0">
                 <a:solidFill>
-                  <a:srgbClr val="C9D3F5"/>
+                  <a:srgbClr val="1F2429"/>
                 </a:solidFill>
                 <a:latin typeface="Courier New" pitchFamily="34" charset="0"/>
                 <a:ea typeface="Courier New" pitchFamily="34" charset="-122"/>
@@ -4865,7 +4873,7 @@
             <a:r>
               <a:rPr lang="en-US" sz="1400" dirty="0">
                 <a:solidFill>
-                  <a:srgbClr val="C9D3F5"/>
+                  <a:srgbClr val="1F2429"/>
                 </a:solidFill>
                 <a:latin typeface="Courier New" pitchFamily="34" charset="0"/>
                 <a:ea typeface="Courier New" pitchFamily="34" charset="-122"/>
@@ -4885,7 +4893,7 @@
             <a:r>
               <a:rPr lang="en-US" sz="1400" dirty="0">
                 <a:solidFill>
-                  <a:srgbClr val="C9D3F5"/>
+                  <a:srgbClr val="1F2429"/>
                 </a:solidFill>
                 <a:latin typeface="Courier New" pitchFamily="34" charset="0"/>
                 <a:ea typeface="Courier New" pitchFamily="34" charset="-122"/>
@@ -4905,7 +4913,7 @@
             <a:r>
               <a:rPr lang="en-US" sz="1400" dirty="0">
                 <a:solidFill>
-                  <a:srgbClr val="C9D3F5"/>
+                  <a:srgbClr val="1F2429"/>
                 </a:solidFill>
                 <a:latin typeface="Courier New" pitchFamily="34" charset="0"/>
                 <a:ea typeface="Courier New" pitchFamily="34" charset="-122"/>
@@ -4925,7 +4933,7 @@
             <a:r>
               <a:rPr lang="en-US" sz="1400" dirty="0">
                 <a:solidFill>
-                  <a:srgbClr val="C9D3F5"/>
+                  <a:srgbClr val="1F2429"/>
                 </a:solidFill>
                 <a:latin typeface="Courier New" pitchFamily="34" charset="0"/>
                 <a:ea typeface="Courier New" pitchFamily="34" charset="-122"/>
@@ -5107,9 +5115,13 @@
             </a:avLst>
           </a:prstGeom>
           <a:solidFill>
-            <a:srgbClr val="1E1E4C"/>
+            <a:srgbClr val="F7F8F9"/>
           </a:solidFill>
-          <a:ln/>
+          <a:ln w="9525">
+            <a:solidFill>
+              <a:srgbClr val="D0D5DD"/>
+            </a:solidFill>
+          </a:ln>
         </p:spPr>
         <p:txBody>
           <a:bodyPr/>
@@ -5146,7 +5158,7 @@
             <a:r>
               <a:rPr lang="en-US" sz="1400" dirty="0">
                 <a:solidFill>
-                  <a:srgbClr val="C9D3F5"/>
+                  <a:srgbClr val="1F2429"/>
                 </a:solidFill>
                 <a:latin typeface="Courier New" pitchFamily="34" charset="0"/>
                 <a:ea typeface="Courier New" pitchFamily="34" charset="-122"/>
@@ -5166,7 +5178,7 @@
             <a:r>
               <a:rPr lang="en-US" sz="1400" dirty="0">
                 <a:solidFill>
-                  <a:srgbClr val="C9D3F5"/>
+                  <a:srgbClr val="1F2429"/>
                 </a:solidFill>
                 <a:latin typeface="Courier New" pitchFamily="34" charset="0"/>
                 <a:ea typeface="Courier New" pitchFamily="34" charset="-122"/>
@@ -5195,7 +5207,7 @@
             <a:r>
               <a:rPr lang="en-US" sz="1400" dirty="0">
                 <a:solidFill>
-                  <a:srgbClr val="C9D3F5"/>
+                  <a:srgbClr val="1F2429"/>
                 </a:solidFill>
                 <a:latin typeface="Courier New" pitchFamily="34" charset="0"/>
                 <a:ea typeface="Courier New" pitchFamily="34" charset="-122"/>
@@ -5215,7 +5227,7 @@
             <a:r>
               <a:rPr lang="en-US" sz="1400" dirty="0">
                 <a:solidFill>
-                  <a:srgbClr val="C9D3F5"/>
+                  <a:srgbClr val="1F2429"/>
                 </a:solidFill>
                 <a:latin typeface="Courier New" pitchFamily="34" charset="0"/>
                 <a:ea typeface="Courier New" pitchFamily="34" charset="-122"/>
@@ -5244,7 +5256,7 @@
             <a:r>
               <a:rPr lang="en-US" sz="1400" dirty="0">
                 <a:solidFill>
-                  <a:srgbClr val="C9D3F5"/>
+                  <a:srgbClr val="1F2429"/>
                 </a:solidFill>
                 <a:latin typeface="Courier New" pitchFamily="34" charset="0"/>
                 <a:ea typeface="Courier New" pitchFamily="34" charset="-122"/>
@@ -5264,7 +5276,7 @@
             <a:r>
               <a:rPr lang="en-US" sz="1400" dirty="0">
                 <a:solidFill>
-                  <a:srgbClr val="C9D3F5"/>
+                  <a:srgbClr val="1F2429"/>
                 </a:solidFill>
                 <a:latin typeface="Courier New" pitchFamily="34" charset="0"/>
                 <a:ea typeface="Courier New" pitchFamily="34" charset="-122"/>
@@ -5293,7 +5305,7 @@
             <a:r>
               <a:rPr lang="en-US" sz="1400" dirty="0">
                 <a:solidFill>
-                  <a:srgbClr val="C9D3F5"/>
+                  <a:srgbClr val="1F2429"/>
                 </a:solidFill>
                 <a:latin typeface="Courier New" pitchFamily="34" charset="0"/>
                 <a:ea typeface="Courier New" pitchFamily="34" charset="-122"/>
@@ -5313,7 +5325,7 @@
             <a:r>
               <a:rPr lang="en-US" sz="1400" dirty="0">
                 <a:solidFill>
-                  <a:srgbClr val="C9D3F5"/>
+                  <a:srgbClr val="1F2429"/>
                 </a:solidFill>
                 <a:latin typeface="Courier New" pitchFamily="34" charset="0"/>
                 <a:ea typeface="Courier New" pitchFamily="34" charset="-122"/>
@@ -5495,9 +5507,13 @@
             </a:avLst>
           </a:prstGeom>
           <a:solidFill>
-            <a:srgbClr val="1E1E4C"/>
+            <a:srgbClr val="F7F8F9"/>
           </a:solidFill>
-          <a:ln/>
+          <a:ln w="9525">
+            <a:solidFill>
+              <a:srgbClr val="D0D5DD"/>
+            </a:solidFill>
+          </a:ln>
         </p:spPr>
         <p:txBody>
           <a:bodyPr/>
@@ -5534,7 +5550,7 @@
             <a:r>
               <a:rPr lang="en-US" sz="1400" dirty="0">
                 <a:solidFill>
-                  <a:srgbClr val="C9D3F5"/>
+                  <a:srgbClr val="1F2429"/>
                 </a:solidFill>
                 <a:latin typeface="Courier New" pitchFamily="34" charset="0"/>
                 <a:ea typeface="Courier New" pitchFamily="34" charset="-122"/>
@@ -5554,7 +5570,7 @@
             <a:r>
               <a:rPr lang="en-US" sz="1400" dirty="0">
                 <a:solidFill>
-                  <a:srgbClr val="C9D3F5"/>
+                  <a:srgbClr val="1F2429"/>
                 </a:solidFill>
                 <a:latin typeface="Courier New" pitchFamily="34" charset="0"/>
                 <a:ea typeface="Courier New" pitchFamily="34" charset="-122"/>
@@ -5574,7 +5590,7 @@
             <a:r>
               <a:rPr lang="en-US" sz="1400" dirty="0">
                 <a:solidFill>
-                  <a:srgbClr val="C9D3F5"/>
+                  <a:srgbClr val="1F2429"/>
                 </a:solidFill>
                 <a:latin typeface="Courier New" pitchFamily="34" charset="0"/>
                 <a:ea typeface="Courier New" pitchFamily="34" charset="-122"/>
@@ -5795,9 +5811,13 @@
             </a:avLst>
           </a:prstGeom>
           <a:solidFill>
-            <a:srgbClr val="1E1E4C"/>
+            <a:srgbClr val="F7F8F9"/>
           </a:solidFill>
-          <a:ln/>
+          <a:ln w="9525">
+            <a:solidFill>
+              <a:srgbClr val="D0D5DD"/>
+            </a:solidFill>
+          </a:ln>
         </p:spPr>
         <p:txBody>
           <a:bodyPr/>
@@ -5834,7 +5854,7 @@
             <a:r>
               <a:rPr lang="en-US" sz="1400" dirty="0">
                 <a:solidFill>
-                  <a:srgbClr val="C9D3F5"/>
+                  <a:srgbClr val="1F2429"/>
                 </a:solidFill>
                 <a:latin typeface="Courier New" pitchFamily="34" charset="0"/>
                 <a:ea typeface="Courier New" pitchFamily="34" charset="-122"/>
@@ -5854,7 +5874,7 @@
             <a:r>
               <a:rPr lang="en-US" sz="1400" dirty="0">
                 <a:solidFill>
-                  <a:srgbClr val="C9D3F5"/>
+                  <a:srgbClr val="1F2429"/>
                 </a:solidFill>
                 <a:latin typeface="Courier New" pitchFamily="34" charset="0"/>
                 <a:ea typeface="Courier New" pitchFamily="34" charset="-122"/>
@@ -5874,7 +5894,7 @@
             <a:r>
               <a:rPr lang="en-US" sz="1400" dirty="0">
                 <a:solidFill>
-                  <a:srgbClr val="C9D3F5"/>
+                  <a:srgbClr val="1F2429"/>
                 </a:solidFill>
                 <a:latin typeface="Courier New" pitchFamily="34" charset="0"/>
                 <a:ea typeface="Courier New" pitchFamily="34" charset="-122"/>
@@ -5894,7 +5914,7 @@
             <a:r>
               <a:rPr lang="en-US" sz="1400" dirty="0">
                 <a:solidFill>
-                  <a:srgbClr val="C9D3F5"/>
+                  <a:srgbClr val="1F2429"/>
                 </a:solidFill>
                 <a:latin typeface="Courier New" pitchFamily="34" charset="0"/>
                 <a:ea typeface="Courier New" pitchFamily="34" charset="-122"/>
@@ -5914,7 +5934,7 @@
             <a:r>
               <a:rPr lang="en-US" sz="1400" dirty="0">
                 <a:solidFill>
-                  <a:srgbClr val="C9D3F5"/>
+                  <a:srgbClr val="1F2429"/>
                 </a:solidFill>
                 <a:latin typeface="Courier New" pitchFamily="34" charset="0"/>
                 <a:ea typeface="Courier New" pitchFamily="34" charset="-122"/>
@@ -5934,7 +5954,7 @@
             <a:r>
               <a:rPr lang="en-US" sz="1400" dirty="0">
                 <a:solidFill>
-                  <a:srgbClr val="C9D3F5"/>
+                  <a:srgbClr val="1F2429"/>
                 </a:solidFill>
                 <a:latin typeface="Courier New" pitchFamily="34" charset="0"/>
                 <a:ea typeface="Courier New" pitchFamily="34" charset="-122"/>
@@ -5954,7 +5974,7 @@
             <a:r>
               <a:rPr lang="en-US" sz="1400" dirty="0">
                 <a:solidFill>
-                  <a:srgbClr val="C9D3F5"/>
+                  <a:srgbClr val="1F2429"/>
                 </a:solidFill>
                 <a:latin typeface="Courier New" pitchFamily="34" charset="0"/>
                 <a:ea typeface="Courier New" pitchFamily="34" charset="-122"/>
@@ -5974,7 +5994,7 @@
             <a:r>
               <a:rPr lang="en-US" sz="1400" dirty="0">
                 <a:solidFill>
-                  <a:srgbClr val="C9D3F5"/>
+                  <a:srgbClr val="1F2429"/>
                 </a:solidFill>
                 <a:latin typeface="Courier New" pitchFamily="34" charset="0"/>
                 <a:ea typeface="Courier New" pitchFamily="34" charset="-122"/>
@@ -5994,7 +6014,7 @@
             <a:r>
               <a:rPr lang="en-US" sz="1400" dirty="0">
                 <a:solidFill>
-                  <a:srgbClr val="C9D3F5"/>
+                  <a:srgbClr val="1F2429"/>
                 </a:solidFill>
                 <a:latin typeface="Courier New" pitchFamily="34" charset="0"/>
                 <a:ea typeface="Courier New" pitchFamily="34" charset="-122"/>
@@ -6215,9 +6235,13 @@
             </a:avLst>
           </a:prstGeom>
           <a:solidFill>
-            <a:srgbClr val="1E1E4C"/>
+            <a:srgbClr val="F7F8F9"/>
           </a:solidFill>
-          <a:ln/>
+          <a:ln w="9525">
+            <a:solidFill>
+              <a:srgbClr val="D0D5DD"/>
+            </a:solidFill>
+          </a:ln>
         </p:spPr>
         <p:txBody>
           <a:bodyPr/>
@@ -6254,7 +6278,7 @@
             <a:r>
               <a:rPr lang="en-US" sz="1400" dirty="0">
                 <a:solidFill>
-                  <a:srgbClr val="C9D3F5"/>
+                  <a:srgbClr val="1F2429"/>
                 </a:solidFill>
                 <a:latin typeface="Courier New" pitchFamily="34" charset="0"/>
                 <a:ea typeface="Courier New" pitchFamily="34" charset="-122"/>
@@ -6274,7 +6298,7 @@
             <a:r>
               <a:rPr lang="en-US" sz="1400" dirty="0">
                 <a:solidFill>
-                  <a:srgbClr val="C9D3F5"/>
+                  <a:srgbClr val="1F2429"/>
                 </a:solidFill>
                 <a:latin typeface="Courier New" pitchFamily="34" charset="0"/>
                 <a:ea typeface="Courier New" pitchFamily="34" charset="-122"/>
@@ -6294,7 +6318,7 @@
             <a:r>
               <a:rPr lang="en-US" sz="1400" dirty="0">
                 <a:solidFill>
-                  <a:srgbClr val="C9D3F5"/>
+                  <a:srgbClr val="1F2429"/>
                 </a:solidFill>
                 <a:latin typeface="Courier New" pitchFamily="34" charset="0"/>
                 <a:ea typeface="Courier New" pitchFamily="34" charset="-122"/>
@@ -6314,7 +6338,7 @@
             <a:r>
               <a:rPr lang="en-US" sz="1400" dirty="0">
                 <a:solidFill>
-                  <a:srgbClr val="C9D3F5"/>
+                  <a:srgbClr val="1F2429"/>
                 </a:solidFill>
                 <a:latin typeface="Courier New" pitchFamily="34" charset="0"/>
                 <a:ea typeface="Courier New" pitchFamily="34" charset="-122"/>
@@ -6334,7 +6358,7 @@
             <a:r>
               <a:rPr lang="en-US" sz="1400" dirty="0">
                 <a:solidFill>
-                  <a:srgbClr val="C9D3F5"/>
+                  <a:srgbClr val="1F2429"/>
                 </a:solidFill>
                 <a:latin typeface="Courier New" pitchFamily="34" charset="0"/>
                 <a:ea typeface="Courier New" pitchFamily="34" charset="-122"/>
@@ -6354,7 +6378,7 @@
             <a:r>
               <a:rPr lang="en-US" sz="1400" dirty="0">
                 <a:solidFill>
-                  <a:srgbClr val="C9D3F5"/>
+                  <a:srgbClr val="1F2429"/>
                 </a:solidFill>
                 <a:latin typeface="Courier New" pitchFamily="34" charset="0"/>
                 <a:ea typeface="Courier New" pitchFamily="34" charset="-122"/>
@@ -6383,7 +6407,7 @@
             <a:r>
               <a:rPr lang="en-US" sz="1400" dirty="0">
                 <a:solidFill>
-                  <a:srgbClr val="C9D3F5"/>
+                  <a:srgbClr val="1F2429"/>
                 </a:solidFill>
                 <a:latin typeface="Courier New" pitchFamily="34" charset="0"/>
                 <a:ea typeface="Courier New" pitchFamily="34" charset="-122"/>
@@ -6403,7 +6427,7 @@
             <a:r>
               <a:rPr lang="en-US" sz="1400" dirty="0">
                 <a:solidFill>
-                  <a:srgbClr val="C9D3F5"/>
+                  <a:srgbClr val="1F2429"/>
                 </a:solidFill>
                 <a:latin typeface="Courier New" pitchFamily="34" charset="0"/>
                 <a:ea typeface="Courier New" pitchFamily="34" charset="-122"/>
@@ -6577,7 +6601,7 @@
         <p:spPr>
           <a:xfrm>
             <a:off x="640080" y="1965960"/>
-            <a:ext cx="10911535" cy="1737360"/>
+            <a:ext cx="10911535" cy="3657600"/>
           </a:xfrm>
           <a:prstGeom prst="roundRect">
             <a:avLst>
@@ -6608,7 +6632,7 @@
         <p:spPr>
           <a:xfrm>
             <a:off x="868680" y="2103120"/>
-            <a:ext cx="10454335" cy="274320"/>
+            <a:ext cx="10454335" cy="400000"/>
           </a:xfrm>
           <a:prstGeom prst="rect">
             <a:avLst/>
@@ -6624,7 +6648,7 @@
               <a:buNone/>
             </a:pPr>
             <a:r>
-              <a:rPr lang="en-US" sz="1000" b="1" spc="200" kern="0" dirty="0">
+              <a:rPr lang="en-US" sz="1800" b="1" spc="200" kern="0" dirty="0">
                 <a:solidFill>
                   <a:srgbClr val="8A3A12"/>
                 </a:solidFill>
@@ -6634,7 +6658,7 @@
               </a:rPr>
               <a:t>WARNING</a:t>
             </a:r>
-            <a:endParaRPr lang="en-US" sz="1000" dirty="0"/>
+            <a:endParaRPr lang="en-US" sz="1800" dirty="0"/>
           </a:p>
         </p:txBody>
       </p:sp>
@@ -6646,24 +6670,24 @@
         </p:nvSpPr>
         <p:spPr>
           <a:xfrm>
-            <a:off x="868680" y="2404872"/>
-            <a:ext cx="10454335" cy="1143000"/>
-          </a:xfrm>
-          <a:prstGeom prst="rect">
-            <a:avLst/>
-          </a:prstGeom>
-          <a:noFill/>
-          <a:ln/>
-        </p:spPr>
-        <p:txBody>
-          <a:bodyPr wrap="square" lIns="0" tIns="0" rIns="0" bIns="0" rtlCol="0" anchor="t"/>
+            <a:off x="868680" y="2795960"/>
+            <a:ext cx="10454335" cy="2500000"/>
+          </a:xfrm>
+          <a:prstGeom prst="rect">
+            <a:avLst/>
+          </a:prstGeom>
+          <a:noFill/>
+          <a:ln/>
+        </p:spPr>
+        <p:txBody>
+          <a:bodyPr wrap="square" lIns="0" tIns="0" rIns="0" bIns="0" rtlCol="0" anchor="ctr"/>
           <a:lstStyle/>
           <a:p>
             <a:pPr indent="0" marL="0">
               <a:buNone/>
             </a:pPr>
             <a:r>
-              <a:rPr lang="en-US" sz="1250" dirty="0">
+              <a:rPr lang="en-US" sz="2800" dirty="0">
                 <a:solidFill>
                   <a:srgbClr val="26262F"/>
                 </a:solidFill>
@@ -6673,7 +6697,7 @@
               </a:rPr>
               <a:t>By default, findByIdAndUpdate does NOT run your schema's validation rules. Always pass { runValidators: true } if you want Mongoose to check required or enum fields during an update, not just during creation.</a:t>
             </a:r>
-            <a:endParaRPr lang="en-US" sz="1250" dirty="0"/>
+            <a:endParaRPr lang="en-US" sz="2800" dirty="0"/>
           </a:p>
         </p:txBody>
       </p:sp>
@@ -6847,9 +6871,13 @@
             </a:avLst>
           </a:prstGeom>
           <a:solidFill>
-            <a:srgbClr val="1E1E4C"/>
+            <a:srgbClr val="F7F8F9"/>
           </a:solidFill>
-          <a:ln/>
+          <a:ln w="9525">
+            <a:solidFill>
+              <a:srgbClr val="D0D5DD"/>
+            </a:solidFill>
+          </a:ln>
         </p:spPr>
         <p:txBody>
           <a:bodyPr/>
@@ -6886,7 +6914,7 @@
             <a:r>
               <a:rPr lang="en-US" sz="1400" dirty="0">
                 <a:solidFill>
-                  <a:srgbClr val="C9D3F5"/>
+                  <a:srgbClr val="1F2429"/>
                 </a:solidFill>
                 <a:latin typeface="Courier New" pitchFamily="34" charset="0"/>
                 <a:ea typeface="Courier New" pitchFamily="34" charset="-122"/>
@@ -6906,7 +6934,7 @@
             <a:r>
               <a:rPr lang="en-US" sz="1400" dirty="0">
                 <a:solidFill>
-                  <a:srgbClr val="C9D3F5"/>
+                  <a:srgbClr val="1F2429"/>
                 </a:solidFill>
                 <a:latin typeface="Courier New" pitchFamily="34" charset="0"/>
                 <a:ea typeface="Courier New" pitchFamily="34" charset="-122"/>
@@ -8210,9 +8238,13 @@
             </a:avLst>
           </a:prstGeom>
           <a:solidFill>
-            <a:srgbClr val="1E1E4C"/>
+            <a:srgbClr val="F7F8F9"/>
           </a:solidFill>
-          <a:ln/>
+          <a:ln w="9525">
+            <a:solidFill>
+              <a:srgbClr val="D0D5DD"/>
+            </a:solidFill>
+          </a:ln>
         </p:spPr>
         <p:txBody>
           <a:bodyPr/>
@@ -8249,7 +8281,7 @@
             <a:r>
               <a:rPr lang="en-US" sz="1400" dirty="0">
                 <a:solidFill>
-                  <a:srgbClr val="C9D3F5"/>
+                  <a:srgbClr val="1F2429"/>
                 </a:solidFill>
                 <a:latin typeface="Courier New" pitchFamily="34" charset="0"/>
                 <a:ea typeface="Courier New" pitchFamily="34" charset="-122"/>
@@ -8269,7 +8301,7 @@
             <a:r>
               <a:rPr lang="en-US" sz="1400" dirty="0">
                 <a:solidFill>
-                  <a:srgbClr val="C9D3F5"/>
+                  <a:srgbClr val="1F2429"/>
                 </a:solidFill>
                 <a:latin typeface="Courier New" pitchFamily="34" charset="0"/>
                 <a:ea typeface="Courier New" pitchFamily="34" charset="-122"/>
@@ -8289,7 +8321,7 @@
             <a:r>
               <a:rPr lang="en-US" sz="1400" dirty="0">
                 <a:solidFill>
-                  <a:srgbClr val="C9D3F5"/>
+                  <a:srgbClr val="1F2429"/>
                 </a:solidFill>
                 <a:latin typeface="Courier New" pitchFamily="34" charset="0"/>
                 <a:ea typeface="Courier New" pitchFamily="34" charset="-122"/>
@@ -8309,7 +8341,7 @@
             <a:r>
               <a:rPr lang="en-US" sz="1400" dirty="0">
                 <a:solidFill>
-                  <a:srgbClr val="C9D3F5"/>
+                  <a:srgbClr val="1F2429"/>
                 </a:solidFill>
                 <a:latin typeface="Courier New" pitchFamily="34" charset="0"/>
                 <a:ea typeface="Courier New" pitchFamily="34" charset="-122"/>
@@ -8329,7 +8361,7 @@
             <a:r>
               <a:rPr lang="en-US" sz="1400" dirty="0">
                 <a:solidFill>
-                  <a:srgbClr val="C9D3F5"/>
+                  <a:srgbClr val="1F2429"/>
                 </a:solidFill>
                 <a:latin typeface="Courier New" pitchFamily="34" charset="0"/>
                 <a:ea typeface="Courier New" pitchFamily="34" charset="-122"/>
@@ -8349,7 +8381,7 @@
             <a:r>
               <a:rPr lang="en-US" sz="1400" dirty="0">
                 <a:solidFill>
-                  <a:srgbClr val="C9D3F5"/>
+                  <a:srgbClr val="1F2429"/>
                 </a:solidFill>
                 <a:latin typeface="Courier New" pitchFamily="34" charset="0"/>
                 <a:ea typeface="Courier New" pitchFamily="34" charset="-122"/>
@@ -8378,7 +8410,7 @@
             <a:r>
               <a:rPr lang="en-US" sz="1400" dirty="0">
                 <a:solidFill>
-                  <a:srgbClr val="C9D3F5"/>
+                  <a:srgbClr val="1F2429"/>
                 </a:solidFill>
                 <a:latin typeface="Courier New" pitchFamily="34" charset="0"/>
                 <a:ea typeface="Courier New" pitchFamily="34" charset="-122"/>
@@ -8398,7 +8430,7 @@
             <a:r>
               <a:rPr lang="en-US" sz="1400" dirty="0">
                 <a:solidFill>
-                  <a:srgbClr val="C9D3F5"/>
+                  <a:srgbClr val="1F2429"/>
                 </a:solidFill>
                 <a:latin typeface="Courier New" pitchFamily="34" charset="0"/>
                 <a:ea typeface="Courier New" pitchFamily="34" charset="-122"/>
@@ -8418,7 +8450,7 @@
             <a:r>
               <a:rPr lang="en-US" sz="1400" dirty="0">
                 <a:solidFill>
-                  <a:srgbClr val="C9D3F5"/>
+                  <a:srgbClr val="1F2429"/>
                 </a:solidFill>
                 <a:latin typeface="Courier New" pitchFamily="34" charset="0"/>
                 <a:ea typeface="Courier New" pitchFamily="34" charset="-122"/>
@@ -8438,7 +8470,7 @@
             <a:r>
               <a:rPr lang="en-US" sz="1400" dirty="0">
                 <a:solidFill>
-                  <a:srgbClr val="C9D3F5"/>
+                  <a:srgbClr val="1F2429"/>
                 </a:solidFill>
                 <a:latin typeface="Courier New" pitchFamily="34" charset="0"/>
                 <a:ea typeface="Courier New" pitchFamily="34" charset="-122"/>
@@ -9180,7 +9212,7 @@
         <p:spPr>
           <a:xfrm>
             <a:off x="640080" y="1965960"/>
-            <a:ext cx="10911535" cy="1737360"/>
+            <a:ext cx="10911535" cy="3657600"/>
           </a:xfrm>
           <a:prstGeom prst="roundRect">
             <a:avLst>
@@ -9211,7 +9243,7 @@
         <p:spPr>
           <a:xfrm>
             <a:off x="868680" y="2103120"/>
-            <a:ext cx="10454335" cy="274320"/>
+            <a:ext cx="10454335" cy="400000"/>
           </a:xfrm>
           <a:prstGeom prst="rect">
             <a:avLst/>
@@ -9227,7 +9259,7 @@
               <a:buNone/>
             </a:pPr>
             <a:r>
-              <a:rPr lang="en-US" sz="1000" b="1" spc="200" kern="0" dirty="0">
+              <a:rPr lang="en-US" sz="1800" b="1" spc="200" kern="0" dirty="0">
                 <a:solidFill>
                   <a:srgbClr val="33459E"/>
                 </a:solidFill>
@@ -9237,7 +9269,7 @@
               </a:rPr>
               <a:t>NOTE</a:t>
             </a:r>
-            <a:endParaRPr lang="en-US" sz="1000" dirty="0"/>
+            <a:endParaRPr lang="en-US" sz="1800" dirty="0"/>
           </a:p>
         </p:txBody>
       </p:sp>
@@ -9249,24 +9281,24 @@
         </p:nvSpPr>
         <p:spPr>
           <a:xfrm>
-            <a:off x="868680" y="2404872"/>
-            <a:ext cx="10454335" cy="1143000"/>
-          </a:xfrm>
-          <a:prstGeom prst="rect">
-            <a:avLst/>
-          </a:prstGeom>
-          <a:noFill/>
-          <a:ln/>
-        </p:spPr>
-        <p:txBody>
-          <a:bodyPr wrap="square" lIns="0" tIns="0" rIns="0" bIns="0" rtlCol="0" anchor="t"/>
+            <a:off x="868680" y="2795960"/>
+            <a:ext cx="10454335" cy="2500000"/>
+          </a:xfrm>
+          <a:prstGeom prst="rect">
+            <a:avLst/>
+          </a:prstGeom>
+          <a:noFill/>
+          <a:ln/>
+        </p:spPr>
+        <p:txBody>
+          <a:bodyPr wrap="square" lIns="0" tIns="0" rIns="0" bIns="0" rtlCol="0" anchor="ctr"/>
           <a:lstStyle/>
           <a:p>
             <a:pPr indent="0" marL="0">
               <a:buNone/>
             </a:pPr>
             <a:r>
-              <a:rPr lang="en-US" sz="1250" dirty="0">
+              <a:rPr lang="en-US" sz="2800" dirty="0">
                 <a:solidFill>
                   <a:srgbClr val="26262F"/>
                 </a:solidFill>
@@ -9276,7 +9308,7 @@
               </a:rPr>
               <a:t>In a SQL ORM like Sequelize, the equivalent idea is called an association (User.hasMany(Post), Post.belongsTo(User)), and behind the scenes it generates actual SQL JOIN queries.</a:t>
             </a:r>
-            <a:endParaRPr lang="en-US" sz="1250" dirty="0"/>
+            <a:endParaRPr lang="en-US" sz="2800" dirty="0"/>
           </a:p>
         </p:txBody>
       </p:sp>
@@ -10011,9 +10043,13 @@
             </a:avLst>
           </a:prstGeom>
           <a:solidFill>
-            <a:srgbClr val="1E1E4C"/>
+            <a:srgbClr val="F7F8F9"/>
           </a:solidFill>
-          <a:ln/>
+          <a:ln w="9525">
+            <a:solidFill>
+              <a:srgbClr val="D0D5DD"/>
+            </a:solidFill>
+          </a:ln>
         </p:spPr>
         <p:txBody>
           <a:bodyPr/>
@@ -10050,7 +10086,7 @@
             <a:r>
               <a:rPr lang="en-US" sz="1400" dirty="0">
                 <a:solidFill>
-                  <a:srgbClr val="C9D3F5"/>
+                  <a:srgbClr val="1F2429"/>
                 </a:solidFill>
                 <a:latin typeface="Courier New" pitchFamily="34" charset="0"/>
                 <a:ea typeface="Courier New" pitchFamily="34" charset="-122"/>
@@ -10070,7 +10106,7 @@
             <a:r>
               <a:rPr lang="en-US" sz="1400" dirty="0">
                 <a:solidFill>
-                  <a:srgbClr val="C9D3F5"/>
+                  <a:srgbClr val="1F2429"/>
                 </a:solidFill>
                 <a:latin typeface="Courier New" pitchFamily="34" charset="0"/>
                 <a:ea typeface="Courier New" pitchFamily="34" charset="-122"/>
@@ -10252,9 +10288,13 @@
             </a:avLst>
           </a:prstGeom>
           <a:solidFill>
-            <a:srgbClr val="1E1E4C"/>
+            <a:srgbClr val="F7F8F9"/>
           </a:solidFill>
-          <a:ln/>
+          <a:ln w="9525">
+            <a:solidFill>
+              <a:srgbClr val="D0D5DD"/>
+            </a:solidFill>
+          </a:ln>
         </p:spPr>
         <p:txBody>
           <a:bodyPr/>
@@ -10291,7 +10331,7 @@
             <a:r>
               <a:rPr lang="en-US" sz="1400" dirty="0">
                 <a:solidFill>
-                  <a:srgbClr val="C9D3F5"/>
+                  <a:srgbClr val="1F2429"/>
                 </a:solidFill>
                 <a:latin typeface="Courier New" pitchFamily="34" charset="0"/>
                 <a:ea typeface="Courier New" pitchFamily="34" charset="-122"/>
@@ -10311,7 +10351,7 @@
             <a:r>
               <a:rPr lang="en-US" sz="1400" dirty="0">
                 <a:solidFill>
-                  <a:srgbClr val="C9D3F5"/>
+                  <a:srgbClr val="1F2429"/>
                 </a:solidFill>
                 <a:latin typeface="Courier New" pitchFamily="34" charset="0"/>
                 <a:ea typeface="Courier New" pitchFamily="34" charset="-122"/>
@@ -10331,7 +10371,7 @@
             <a:r>
               <a:rPr lang="en-US" sz="1400" dirty="0">
                 <a:solidFill>
-                  <a:srgbClr val="C9D3F5"/>
+                  <a:srgbClr val="1F2429"/>
                 </a:solidFill>
                 <a:latin typeface="Courier New" pitchFamily="34" charset="0"/>
                 <a:ea typeface="Courier New" pitchFamily="34" charset="-122"/>
@@ -10351,7 +10391,7 @@
             <a:r>
               <a:rPr lang="en-US" sz="1400" dirty="0">
                 <a:solidFill>
-                  <a:srgbClr val="C9D3F5"/>
+                  <a:srgbClr val="1F2429"/>
                 </a:solidFill>
                 <a:latin typeface="Courier New" pitchFamily="34" charset="0"/>
                 <a:ea typeface="Courier New" pitchFamily="34" charset="-122"/>
@@ -10371,7 +10411,7 @@
             <a:r>
               <a:rPr lang="en-US" sz="1400" dirty="0">
                 <a:solidFill>
-                  <a:srgbClr val="C9D3F5"/>
+                  <a:srgbClr val="1F2429"/>
                 </a:solidFill>
                 <a:latin typeface="Courier New" pitchFamily="34" charset="0"/>
                 <a:ea typeface="Courier New" pitchFamily="34" charset="-122"/>
@@ -10391,7 +10431,7 @@
             <a:r>
               <a:rPr lang="en-US" sz="1400" dirty="0">
                 <a:solidFill>
-                  <a:srgbClr val="C9D3F5"/>
+                  <a:srgbClr val="1F2429"/>
                 </a:solidFill>
                 <a:latin typeface="Courier New" pitchFamily="34" charset="0"/>
                 <a:ea typeface="Courier New" pitchFamily="34" charset="-122"/>
@@ -10411,7 +10451,7 @@
             <a:r>
               <a:rPr lang="en-US" sz="1400" dirty="0">
                 <a:solidFill>
-                  <a:srgbClr val="C9D3F5"/>
+                  <a:srgbClr val="1F2429"/>
                 </a:solidFill>
                 <a:latin typeface="Courier New" pitchFamily="34" charset="0"/>
                 <a:ea typeface="Courier New" pitchFamily="34" charset="-122"/>
@@ -10431,7 +10471,7 @@
             <a:r>
               <a:rPr lang="en-US" sz="1400" dirty="0">
                 <a:solidFill>
-                  <a:srgbClr val="C9D3F5"/>
+                  <a:srgbClr val="1F2429"/>
                 </a:solidFill>
                 <a:latin typeface="Courier New" pitchFamily="34" charset="0"/>
                 <a:ea typeface="Courier New" pitchFamily="34" charset="-122"/>
@@ -10451,7 +10491,7 @@
             <a:r>
               <a:rPr lang="en-US" sz="1400" dirty="0">
                 <a:solidFill>
-                  <a:srgbClr val="C9D3F5"/>
+                  <a:srgbClr val="1F2429"/>
                 </a:solidFill>
                 <a:latin typeface="Courier New" pitchFamily="34" charset="0"/>
                 <a:ea typeface="Courier New" pitchFamily="34" charset="-122"/>
@@ -10471,7 +10511,7 @@
             <a:r>
               <a:rPr lang="en-US" sz="1400" dirty="0">
                 <a:solidFill>
-                  <a:srgbClr val="C9D3F5"/>
+                  <a:srgbClr val="1F2429"/>
                 </a:solidFill>
                 <a:latin typeface="Courier New" pitchFamily="34" charset="0"/>
                 <a:ea typeface="Courier New" pitchFamily="34" charset="-122"/>
@@ -10491,7 +10531,7 @@
             <a:r>
               <a:rPr lang="en-US" sz="1400" dirty="0">
                 <a:solidFill>
-                  <a:srgbClr val="C9D3F5"/>
+                  <a:srgbClr val="1F2429"/>
                 </a:solidFill>
                 <a:latin typeface="Courier New" pitchFamily="34" charset="0"/>
                 <a:ea typeface="Courier New" pitchFamily="34" charset="-122"/>
@@ -10511,7 +10551,7 @@
             <a:r>
               <a:rPr lang="en-US" sz="1400" dirty="0">
                 <a:solidFill>
-                  <a:srgbClr val="C9D3F5"/>
+                  <a:srgbClr val="1F2429"/>
                 </a:solidFill>
                 <a:latin typeface="Courier New" pitchFamily="34" charset="0"/>
                 <a:ea typeface="Courier New" pitchFamily="34" charset="-122"/>
@@ -11558,7 +11598,7 @@
         <p:spPr>
           <a:xfrm>
             <a:off x="640080" y="1965960"/>
-            <a:ext cx="10911535" cy="1737360"/>
+            <a:ext cx="10911535" cy="3657600"/>
           </a:xfrm>
           <a:prstGeom prst="roundRect">
             <a:avLst>
@@ -11589,7 +11629,7 @@
         <p:spPr>
           <a:xfrm>
             <a:off x="868680" y="2103120"/>
-            <a:ext cx="10454335" cy="274320"/>
+            <a:ext cx="10454335" cy="400000"/>
           </a:xfrm>
           <a:prstGeom prst="rect">
             <a:avLst/>
@@ -11605,7 +11645,7 @@
               <a:buNone/>
             </a:pPr>
             <a:r>
-              <a:rPr lang="en-US" sz="1000" b="1" spc="200" kern="0" dirty="0">
+              <a:rPr lang="en-US" sz="1800" b="1" spc="200" kern="0" dirty="0">
                 <a:solidFill>
                   <a:srgbClr val="1F7A46"/>
                 </a:solidFill>
@@ -11615,7 +11655,7 @@
               </a:rPr>
               <a:t>TIP</a:t>
             </a:r>
-            <a:endParaRPr lang="en-US" sz="1000" dirty="0"/>
+            <a:endParaRPr lang="en-US" sz="1800" dirty="0"/>
           </a:p>
         </p:txBody>
       </p:sp>
@@ -11627,24 +11667,24 @@
         </p:nvSpPr>
         <p:spPr>
           <a:xfrm>
-            <a:off x="868680" y="2404872"/>
-            <a:ext cx="10454335" cy="1143000"/>
-          </a:xfrm>
-          <a:prstGeom prst="rect">
-            <a:avLst/>
-          </a:prstGeom>
-          <a:noFill/>
-          <a:ln/>
-        </p:spPr>
-        <p:txBody>
-          <a:bodyPr wrap="square" lIns="0" tIns="0" rIns="0" bIns="0" rtlCol="0" anchor="t"/>
+            <a:off x="868680" y="2795960"/>
+            <a:ext cx="10454335" cy="2500000"/>
+          </a:xfrm>
+          <a:prstGeom prst="rect">
+            <a:avLst/>
+          </a:prstGeom>
+          <a:noFill/>
+          <a:ln/>
+        </p:spPr>
+        <p:txBody>
+          <a:bodyPr wrap="square" lIns="0" tIns="0" rIns="0" bIns="0" rtlCol="0" anchor="ctr"/>
           <a:lstStyle/>
           <a:p>
             <a:pPr indent="0" marL="0">
               <a:buNone/>
             </a:pPr>
             <a:r>
-              <a:rPr lang="en-US" sz="1250" dirty="0">
+              <a:rPr lang="en-US" sz="2800" dirty="0">
                 <a:solidFill>
                   <a:srgbClr val="26262F"/>
                 </a:solidFill>
@@ -11654,7 +11694,7 @@
               </a:rPr>
               <a:t>Most ORMs/ODMs, including Mongoose, let you drop to raw queries when you need to (.aggregate() for MongoDB's pipeline, for example). Use the ORM for everyday CRUD and drop to raw queries for the rare complex case.</a:t>
             </a:r>
-            <a:endParaRPr lang="en-US" sz="1250" dirty="0"/>
+            <a:endParaRPr lang="en-US" sz="2800" dirty="0"/>
           </a:p>
         </p:txBody>
       </p:sp>
@@ -14243,7 +14283,7 @@
         <p:spPr>
           <a:xfrm>
             <a:off x="640080" y="1965960"/>
-            <a:ext cx="10911535" cy="1737360"/>
+            <a:ext cx="10911535" cy="3980000"/>
           </a:xfrm>
           <a:prstGeom prst="roundRect">
             <a:avLst>
@@ -14274,7 +14314,7 @@
         <p:spPr>
           <a:xfrm>
             <a:off x="868680" y="2103120"/>
-            <a:ext cx="10454335" cy="274320"/>
+            <a:ext cx="10454335" cy="400000"/>
           </a:xfrm>
           <a:prstGeom prst="rect">
             <a:avLst/>
@@ -14290,7 +14330,7 @@
               <a:buNone/>
             </a:pPr>
             <a:r>
-              <a:rPr lang="en-US" sz="1000" b="1" spc="200" kern="0" dirty="0">
+              <a:rPr lang="en-US" sz="1800" b="1" spc="200" kern="0" dirty="0">
                 <a:solidFill>
                   <a:srgbClr val="33459E"/>
                 </a:solidFill>
@@ -14300,7 +14340,7 @@
               </a:rPr>
               <a:t>NOTE</a:t>
             </a:r>
-            <a:endParaRPr lang="en-US" sz="1000" dirty="0"/>
+            <a:endParaRPr lang="en-US" sz="1800" dirty="0"/>
           </a:p>
         </p:txBody>
       </p:sp>
@@ -14312,24 +14352,24 @@
         </p:nvSpPr>
         <p:spPr>
           <a:xfrm>
-            <a:off x="868680" y="2404872"/>
-            <a:ext cx="10454335" cy="1143000"/>
-          </a:xfrm>
-          <a:prstGeom prst="rect">
-            <a:avLst/>
-          </a:prstGeom>
-          <a:noFill/>
-          <a:ln/>
-        </p:spPr>
-        <p:txBody>
-          <a:bodyPr wrap="square" lIns="0" tIns="0" rIns="0" bIns="0" rtlCol="0" anchor="t"/>
+            <a:off x="868680" y="2795960"/>
+            <a:ext cx="10454335" cy="3000000"/>
+          </a:xfrm>
+          <a:prstGeom prst="rect">
+            <a:avLst/>
+          </a:prstGeom>
+          <a:noFill/>
+          <a:ln/>
+        </p:spPr>
+        <p:txBody>
+          <a:bodyPr wrap="square" lIns="0" tIns="0" rIns="0" bIns="0" rtlCol="0" anchor="ctr"/>
           <a:lstStyle/>
           <a:p>
             <a:pPr indent="0" marL="0">
               <a:buNone/>
             </a:pPr>
             <a:r>
-              <a:rPr lang="en-US" sz="1250" dirty="0">
+              <a:rPr lang="en-US" sz="2800" dirty="0">
                 <a:solidFill>
                   <a:srgbClr val="26262F"/>
                 </a:solidFill>
@@ -14339,7 +14379,7 @@
               </a:rPr>
               <a:t>"Object-relational mapping" comes from the relational-database world. When people say "ORM" loosely today, they often mean any object-mapping tool, including document-database ODMs like Mongoose. This course uses "ORM/ODM" to be precise, but expect to see "ORM" used for both.</a:t>
             </a:r>
-            <a:endParaRPr lang="en-US" sz="1250" dirty="0"/>
+            <a:endParaRPr lang="en-US" sz="2800" dirty="0"/>
           </a:p>
         </p:txBody>
       </p:sp>
@@ -14972,9 +15012,13 @@
             </a:avLst>
           </a:prstGeom>
           <a:solidFill>
-            <a:srgbClr val="1E1E4C"/>
+            <a:srgbClr val="F7F8F9"/>
           </a:solidFill>
-          <a:ln/>
+          <a:ln w="9525">
+            <a:solidFill>
+              <a:srgbClr val="D0D5DD"/>
+            </a:solidFill>
+          </a:ln>
         </p:spPr>
         <p:txBody>
           <a:bodyPr/>
@@ -15011,7 +15055,7 @@
             <a:r>
               <a:rPr lang="en-US" sz="1400" dirty="0">
                 <a:solidFill>
-                  <a:srgbClr val="C9D3F5"/>
+                  <a:srgbClr val="1F2429"/>
                 </a:solidFill>
                 <a:latin typeface="Courier New" pitchFamily="34" charset="0"/>
                 <a:ea typeface="Courier New" pitchFamily="34" charset="-122"/>
@@ -15031,7 +15075,7 @@
             <a:r>
               <a:rPr lang="en-US" sz="1400" dirty="0">
                 <a:solidFill>
-                  <a:srgbClr val="C9D3F5"/>
+                  <a:srgbClr val="1F2429"/>
                 </a:solidFill>
                 <a:latin typeface="Courier New" pitchFamily="34" charset="0"/>
                 <a:ea typeface="Courier New" pitchFamily="34" charset="-122"/>
@@ -15060,7 +15104,7 @@
             <a:r>
               <a:rPr lang="en-US" sz="1400" dirty="0">
                 <a:solidFill>
-                  <a:srgbClr val="C9D3F5"/>
+                  <a:srgbClr val="1F2429"/>
                 </a:solidFill>
                 <a:latin typeface="Courier New" pitchFamily="34" charset="0"/>
                 <a:ea typeface="Courier New" pitchFamily="34" charset="-122"/>
@@ -15080,7 +15124,7 @@
             <a:r>
               <a:rPr lang="en-US" sz="1400" dirty="0">
                 <a:solidFill>
-                  <a:srgbClr val="C9D3F5"/>
+                  <a:srgbClr val="1F2429"/>
                 </a:solidFill>
                 <a:latin typeface="Courier New" pitchFamily="34" charset="0"/>
                 <a:ea typeface="Courier New" pitchFamily="34" charset="-122"/>
@@ -15100,7 +15144,7 @@
             <a:r>
               <a:rPr lang="en-US" sz="1400" dirty="0">
                 <a:solidFill>
-                  <a:srgbClr val="C9D3F5"/>
+                  <a:srgbClr val="1F2429"/>
                 </a:solidFill>
                 <a:latin typeface="Courier New" pitchFamily="34" charset="0"/>
                 <a:ea typeface="Courier New" pitchFamily="34" charset="-122"/>
@@ -15282,9 +15326,13 @@
             </a:avLst>
           </a:prstGeom>
           <a:solidFill>
-            <a:srgbClr val="1E1E4C"/>
+            <a:srgbClr val="F7F8F9"/>
           </a:solidFill>
-          <a:ln/>
+          <a:ln w="9525">
+            <a:solidFill>
+              <a:srgbClr val="D0D5DD"/>
+            </a:solidFill>
+          </a:ln>
         </p:spPr>
         <p:txBody>
           <a:bodyPr/>
@@ -15321,7 +15369,7 @@
             <a:r>
               <a:rPr lang="en-US" sz="1400" dirty="0">
                 <a:solidFill>
-                  <a:srgbClr val="C9D3F5"/>
+                  <a:srgbClr val="1F2429"/>
                 </a:solidFill>
                 <a:latin typeface="Courier New" pitchFamily="34" charset="0"/>
                 <a:ea typeface="Courier New" pitchFamily="34" charset="-122"/>
@@ -15350,7 +15398,7 @@
             <a:r>
               <a:rPr lang="en-US" sz="1400" dirty="0">
                 <a:solidFill>
-                  <a:srgbClr val="C9D3F5"/>
+                  <a:srgbClr val="1F2429"/>
                 </a:solidFill>
                 <a:latin typeface="Courier New" pitchFamily="34" charset="0"/>
                 <a:ea typeface="Courier New" pitchFamily="34" charset="-122"/>
@@ -15370,7 +15418,7 @@
             <a:r>
               <a:rPr lang="en-US" sz="1400" dirty="0">
                 <a:solidFill>
-                  <a:srgbClr val="C9D3F5"/>
+                  <a:srgbClr val="1F2429"/>
                 </a:solidFill>
                 <a:latin typeface="Courier New" pitchFamily="34" charset="0"/>
                 <a:ea typeface="Courier New" pitchFamily="34" charset="-122"/>
@@ -15390,7 +15438,7 @@
             <a:r>
               <a:rPr lang="en-US" sz="1400" dirty="0">
                 <a:solidFill>
-                  <a:srgbClr val="C9D3F5"/>
+                  <a:srgbClr val="1F2429"/>
                 </a:solidFill>
                 <a:latin typeface="Courier New" pitchFamily="34" charset="0"/>
                 <a:ea typeface="Courier New" pitchFamily="34" charset="-122"/>
@@ -15410,7 +15458,7 @@
             <a:r>
               <a:rPr lang="en-US" sz="1400" dirty="0">
                 <a:solidFill>
-                  <a:srgbClr val="C9D3F5"/>
+                  <a:srgbClr val="1F2429"/>
                 </a:solidFill>
                 <a:latin typeface="Courier New" pitchFamily="34" charset="0"/>
                 <a:ea typeface="Courier New" pitchFamily="34" charset="-122"/>
@@ -15430,7 +15478,7 @@
             <a:r>
               <a:rPr lang="en-US" sz="1400" dirty="0">
                 <a:solidFill>
-                  <a:srgbClr val="C9D3F5"/>
+                  <a:srgbClr val="1F2429"/>
                 </a:solidFill>
                 <a:latin typeface="Courier New" pitchFamily="34" charset="0"/>
                 <a:ea typeface="Courier New" pitchFamily="34" charset="-122"/>
@@ -15450,7 +15498,7 @@
             <a:r>
               <a:rPr lang="en-US" sz="1400" dirty="0">
                 <a:solidFill>
-                  <a:srgbClr val="C9D3F5"/>
+                  <a:srgbClr val="1F2429"/>
                 </a:solidFill>
                 <a:latin typeface="Courier New" pitchFamily="34" charset="0"/>
                 <a:ea typeface="Courier New" pitchFamily="34" charset="-122"/>
@@ -15470,7 +15518,7 @@
             <a:r>
               <a:rPr lang="en-US" sz="1400" dirty="0">
                 <a:solidFill>
-                  <a:srgbClr val="C9D3F5"/>
+                  <a:srgbClr val="1F2429"/>
                 </a:solidFill>
                 <a:latin typeface="Courier New" pitchFamily="34" charset="0"/>
                 <a:ea typeface="Courier New" pitchFamily="34" charset="-122"/>
@@ -15499,7 +15547,7 @@
             <a:r>
               <a:rPr lang="en-US" sz="1400" dirty="0">
                 <a:solidFill>
-                  <a:srgbClr val="C9D3F5"/>
+                  <a:srgbClr val="1F2429"/>
                 </a:solidFill>
                 <a:latin typeface="Courier New" pitchFamily="34" charset="0"/>
                 <a:ea typeface="Courier New" pitchFamily="34" charset="-122"/>
